--- a/Hackathon/Live_Demo_RWE_in_Action_with_Agentic_AI/RWE_in_Action_with_Agentic_AI.pptx
+++ b/Hackathon/Live_Demo_RWE_in_Action_with_Agentic_AI/RWE_in_Action_with_Agentic_AI.pptx
@@ -1202,32 +1202,37 @@
           <a:lstStyle/>
           <a:p>
             <a:r>
-              <a:t>The architecture, left to right. Real-world data on the left: the registry as tables in SAS Viya, the four national</a:t>
-            </a:r>
-          </a:p>
-          <a:p>
-            <a:r>
-              <a:t>guidelines chunked and embedded, and the deployed models. In the middle, Basira: a supervisor agent that reads the</a:t>
-            </a:r>
-          </a:p>
-          <a:p>
-            <a:r>
-              <a:t>question and sends five specialists to work, each wrapped as a tool with its own narrow job: cohort, guideline, risk,</a:t>
-            </a:r>
-          </a:p>
-          <a:p>
-            <a:r>
-              <a:t>population health (through an MCP server), action. On the right, what comes out: a cited answer and a chart, a draft</a:t>
-            </a:r>
-          </a:p>
-          <a:p>
-            <a:r>
-              <a:t>that lands in an approval queue, a person who decides, and an audit trail. Nothing the agent drafts reaches the</a:t>
-            </a:r>
-          </a:p>
-          <a:p>
-            <a:r>
-              <a:t>record; the queue is the only exit. That is the slide-5 pattern, filled in.</a:t>
+              <a:t>The one picture to remember. Left: two kinds of data. The guidelines are chunked, embedded and stored as vectors (the</a:t>
+            </a:r>
+          </a:p>
+          <a:p>
+            <a:r>
+              <a:t>knowledge base the agent quotes from); the registry is loaded as a CAS table in SAS Viya. Middle: the agent, a</a:t>
+            </a:r>
+          </a:p>
+          <a:p>
+            <a:r>
+              <a:t>supervisor that sends five specialists to work (cohort, guideline, risk, population health, action), grounds every</a:t>
+            </a:r>
+          </a:p>
+          <a:p>
+            <a:r>
+              <a:t>clinical statement in a guideline section, and logs every call. Right: the MCP server and the tools it exposes: score</a:t>
+            </a:r>
+          </a:p>
+          <a:p>
+            <a:r>
+              <a:t>and simulate with the deployed models, quality measures and care gaps, a draft that lands in the approval queue, a</a:t>
+            </a:r>
+          </a:p>
+          <a:p>
+            <a:r>
+              <a:t>chart, a query. Follow the dotted line: the registry becomes a CAS table and the SQL tool reads it; the agent itself</a:t>
+            </a:r>
+          </a:p>
+          <a:p>
+            <a:r>
+              <a:t>never touches the table. Nothing the agent drafts reaches the record; the approval queue is the only exit.</a:t>
             </a:r>
           </a:p>
         </p:txBody>
@@ -1642,32 +1647,37 @@
           <a:lstStyle/>
           <a:p>
             <a:r>
-              <a:t>Left to right. What the person enters, in two minutes, including free text in their own words. The engine: a</a:t>
-            </a:r>
-          </a:p>
-          <a:p>
-            <a:r>
-              <a:t>published risk score with measured tiers; the pathway rules of the national programme, with the family-history,</a:t>
-            </a:r>
-          </a:p>
-          <a:p>
-            <a:r>
-              <a:t>surveillance and red-flag branches; the nearest door with the right service; and a language model that reads the</a:t>
-            </a:r>
-          </a:p>
-          <a:p>
-            <a:r>
-              <a:t>free text and answers questions but never diagnoses and never overrides the rules. What comes back: a tier, a</a:t>
-            </a:r>
-          </a:p>
-          <a:p>
-            <a:r>
-              <a:t>pathway, a place, what to change, and, above all, red flags sent to the urgent route rather than the screening queue.</a:t>
-            </a:r>
-          </a:p>
-          <a:p>
-            <a:r>
-              <a:t>This is the slide-5 pattern again: the rules and the score are the tools, the model only explains.</a:t>
+              <a:t>Same picture, second example. Left: what the person writes in their own words is read by the language model and turned</a:t>
+            </a:r>
+          </a:p>
+          <a:p>
+            <a:r>
+              <a:t>into flags to tick ("you mentioned blood") and questions answered; what they enter in the form feeds the score and the</a:t>
+            </a:r>
+          </a:p>
+          <a:p>
+            <a:r>
+              <a:t>rules. Middle: the screening agent, with the rules in charge: a published score and the national programme decide the</a:t>
+            </a:r>
+          </a:p>
+          <a:p>
+            <a:r>
+              <a:t>pathway, red flags override everything, the model only explains, nothing is stored. Right: the tools behind the MCP</a:t>
+            </a:r>
+          </a:p>
+          <a:p>
+            <a:r>
+              <a:t>server: the score, the pathway rules, the nearest facility with distance and minutes, the lifestyle levers, and the</a:t>
+            </a:r>
+          </a:p>
+          <a:p>
+            <a:r>
+              <a:t>question-answering model. Follow the dotted line: the facilities table feeds the nearest-door tool. What it delivers: a</a:t>
+            </a:r>
+          </a:p>
+          <a:p>
+            <a:r>
+              <a:t>tier with a measured chance, the right test and place, and red flags sent to a doctor rather than the screening queue.</a:t>
             </a:r>
           </a:p>
         </p:txBody>
@@ -7808,7 +7818,7 @@
           <a:p>
             <a:r>
               <a:rPr sz="3200"/>
-              <a:t>The solution: one supervisor agent, five specialists, and a person who signs every action</a:t>
+              <a:t>The solution: one agent over the registry, the guidelines and the models, and a person who signs every action</a:t>
             </a:r>
           </a:p>
         </p:txBody>
@@ -7857,7 +7867,7 @@
         <p:spPr>
           <a:xfrm>
             <a:off x="1252728" y="2286000"/>
-            <a:ext cx="3931920" cy="274320"/>
+            <a:ext cx="3931920" cy="365760"/>
           </a:xfrm>
           <a:prstGeom prst="rect">
             <a:avLst/>
@@ -7870,15 +7880,15 @@
           </a:bodyPr>
           <a:lstStyle/>
           <a:p>
-            <a:pPr algn="l"/>
-            <a:r>
-              <a:rPr sz="1050">
+            <a:pPr algn="ctr"/>
+            <a:r>
+              <a:rPr sz="1600">
                 <a:solidFill>
                   <a:srgbClr val="0766D1"/>
                 </a:solidFill>
                 <a:latin typeface="+mj-lt"/>
               </a:rPr>
-              <a:t>REAL-WORLD DATA</a:t>
+              <a:t>Unstructured data</a:t>
             </a:r>
           </a:p>
         </p:txBody>
@@ -7892,26 +7902,21 @@
         <p:spPr>
           <a:xfrm>
             <a:off x="1252728" y="2651760"/>
-            <a:ext cx="3931920" cy="1783080"/>
+            <a:ext cx="3931920" cy="2971800"/>
           </a:xfrm>
           <a:prstGeom prst="roundRect">
             <a:avLst>
-              <a:gd name="adj" fmla="val 14358"/>
+              <a:gd name="adj" fmla="val 7692"/>
             </a:avLst>
           </a:prstGeom>
-          <a:solidFill>
-            <a:srgbClr val="FFFFFF"/>
-          </a:solidFill>
-          <a:ln>
-            <a:noFill/>
+          <a:noFill/>
+          <a:ln w="15875">
+            <a:solidFill>
+              <a:srgbClr val="0766D1"/>
+            </a:solidFill>
+            <a:prstDash val="sysDot"/>
           </a:ln>
-          <a:effectLst>
-            <a:outerShdw blurRad="203200" dist="38100" dir="5400000" algn="ctr" rotWithShape="0">
-              <a:srgbClr val="000000">
-                <a:alpha val="16000"/>
-              </a:srgbClr>
-            </a:outerShdw>
-          </a:effectLst>
+          <a:effectLst/>
         </p:spPr>
         <p:style>
           <a:lnRef idx="1">
@@ -7937,20 +7942,22 @@
       </p:sp>
       <p:sp>
         <p:nvSpPr>
-          <p:cNvPr id="8" name="Oval 7"/>
+          <p:cNvPr id="8" name="Rounded Rectangle 7"/>
           <p:cNvSpPr/>
           <p:nvPr/>
         </p:nvSpPr>
         <p:spPr>
           <a:xfrm>
-            <a:off x="1481328" y="2834640"/>
-            <a:ext cx="640080" cy="640080"/>
-          </a:xfrm>
-          <a:prstGeom prst="ellipse">
-            <a:avLst/>
+            <a:off x="1527048" y="2834640"/>
+            <a:ext cx="3383280" cy="640080"/>
+          </a:xfrm>
+          <a:prstGeom prst="roundRect">
+            <a:avLst>
+              <a:gd name="adj" fmla="val 17142"/>
+            </a:avLst>
           </a:prstGeom>
           <a:solidFill>
-            <a:srgbClr val="032954"/>
+            <a:srgbClr val="E4E7EA"/>
           </a:solidFill>
           <a:ln>
             <a:noFill/>
@@ -7972,47 +7979,32 @@
           </a:fontRef>
         </p:style>
         <p:txBody>
-          <a:bodyPr rtlCol="0" anchor="ctr"/>
+          <a:bodyPr rtlCol="0" anchor="ctr" wrap="square" lIns="109728" tIns="54864" rIns="109728" bIns="54864"/>
           <a:lstStyle/>
           <a:p>
             <a:pPr algn="ctr"/>
-          </a:p>
-        </p:txBody>
-      </p:sp>
-      <p:pic>
-        <p:nvPicPr>
-          <p:cNvPr id="9" name="Picture 8" descr="database_w.png"/>
-          <p:cNvPicPr>
-            <a:picLocks noChangeAspect="1"/>
-          </p:cNvPicPr>
-          <p:nvPr/>
-        </p:nvPicPr>
-        <p:blipFill>
-          <a:blip r:embed="rId2"/>
-          <a:stretch>
-            <a:fillRect/>
-          </a:stretch>
-        </p:blipFill>
-        <p:spPr>
-          <a:xfrm>
-            <a:off x="1625346" y="2978658"/>
-            <a:ext cx="352044" cy="352044"/>
-          </a:xfrm>
-          <a:prstGeom prst="rect">
-            <a:avLst/>
-          </a:prstGeom>
-        </p:spPr>
-      </p:pic>
-      <p:sp>
-        <p:nvSpPr>
-          <p:cNvPr id="10" name="TextBox 9"/>
+            <a:r>
+              <a:rPr sz="1300">
+                <a:solidFill>
+                  <a:srgbClr val="262626"/>
+                </a:solidFill>
+                <a:latin typeface="+mj-lt"/>
+              </a:rPr>
+              <a:t>Clinical guidelines &amp; policy documents</a:t>
+            </a:r>
+          </a:p>
+        </p:txBody>
+      </p:sp>
+      <p:sp>
+        <p:nvSpPr>
+          <p:cNvPr id="9" name="TextBox 8"/>
           <p:cNvSpPr txBox="1"/>
           <p:nvPr/>
         </p:nvSpPr>
         <p:spPr>
           <a:xfrm>
-            <a:off x="2258568" y="2907791"/>
-            <a:ext cx="2788920" cy="457200"/>
+            <a:off x="1527048" y="3493008"/>
+            <a:ext cx="3383280" cy="457200"/>
           </a:xfrm>
           <a:prstGeom prst="rect">
             <a:avLst/>
@@ -8025,117 +8017,30 @@
           </a:bodyPr>
           <a:lstStyle/>
           <a:p>
-            <a:pPr algn="l"/>
-            <a:r>
-              <a:rPr sz="1500">
-                <a:solidFill>
-                  <a:srgbClr val="262626"/>
-                </a:solidFill>
-                <a:latin typeface="+mj-lt"/>
-              </a:rPr>
-              <a:t>Diabetes registry</a:t>
-            </a:r>
-          </a:p>
-        </p:txBody>
-      </p:sp>
-      <p:sp>
-        <p:nvSpPr>
-          <p:cNvPr id="11" name="TextBox 10"/>
-          <p:cNvSpPr txBox="1"/>
-          <p:nvPr/>
-        </p:nvSpPr>
-        <p:spPr>
-          <a:xfrm>
-            <a:off x="1572768" y="3520439"/>
-            <a:ext cx="3291840" cy="868680"/>
-          </a:xfrm>
-          <a:prstGeom prst="rect">
-            <a:avLst/>
-          </a:prstGeom>
-          <a:noFill/>
-        </p:spPr>
-        <p:txBody>
-          <a:bodyPr wrap="square" lIns="45720" tIns="27432" rIns="45720" bIns="27432" anchor="t">
-            <a:spAutoFit/>
-          </a:bodyPr>
-          <a:lstStyle/>
-          <a:p>
-            <a:pPr algn="l"/>
-            <a:r>
-              <a:rPr sz="1200">
-                <a:solidFill>
-                  <a:srgbClr val="262626"/>
-                </a:solidFill>
-              </a:rPr>
-              <a:t>Tables in SAS Viya: 4,000 patients, 36 months, 54 fields, from the health information exchange</a:t>
-            </a:r>
-          </a:p>
-        </p:txBody>
-      </p:sp>
-      <p:sp>
-        <p:nvSpPr>
-          <p:cNvPr id="12" name="Rounded Rectangle 11"/>
+            <a:pPr algn="ctr"/>
+            <a:r>
+              <a:rPr sz="1100">
+                <a:solidFill>
+                  <a:srgbClr val="7E889A"/>
+                </a:solidFill>
+              </a:rPr>
+              <a:t>National guidelines, care protocols, policy frameworks</a:t>
+            </a:r>
+          </a:p>
+        </p:txBody>
+      </p:sp>
+      <p:sp>
+        <p:nvSpPr>
+          <p:cNvPr id="10" name="Down Arrow 9"/>
           <p:cNvSpPr/>
           <p:nvPr/>
         </p:nvSpPr>
         <p:spPr>
           <a:xfrm>
-            <a:off x="1252728" y="4709160"/>
-            <a:ext cx="3931920" cy="1783080"/>
-          </a:xfrm>
-          <a:prstGeom prst="roundRect">
-            <a:avLst>
-              <a:gd name="adj" fmla="val 14358"/>
-            </a:avLst>
-          </a:prstGeom>
-          <a:solidFill>
-            <a:srgbClr val="FFFFFF"/>
-          </a:solidFill>
-          <a:ln>
-            <a:noFill/>
-          </a:ln>
-          <a:effectLst>
-            <a:outerShdw blurRad="203200" dist="38100" dir="5400000" algn="ctr" rotWithShape="0">
-              <a:srgbClr val="000000">
-                <a:alpha val="16000"/>
-              </a:srgbClr>
-            </a:outerShdw>
-          </a:effectLst>
-        </p:spPr>
-        <p:style>
-          <a:lnRef idx="1">
-            <a:schemeClr val="accent1"/>
-          </a:lnRef>
-          <a:fillRef idx="3">
-            <a:schemeClr val="accent1"/>
-          </a:fillRef>
-          <a:effectRef idx="2">
-            <a:schemeClr val="accent1"/>
-          </a:effectRef>
-          <a:fontRef idx="minor">
-            <a:schemeClr val="lt1"/>
-          </a:fontRef>
-        </p:style>
-        <p:txBody>
-          <a:bodyPr rtlCol="0" anchor="ctr"/>
-          <a:lstStyle/>
-          <a:p>
-            <a:pPr algn="ctr"/>
-          </a:p>
-        </p:txBody>
-      </p:sp>
-      <p:sp>
-        <p:nvSpPr>
-          <p:cNvPr id="13" name="Oval 12"/>
-          <p:cNvSpPr/>
-          <p:nvPr/>
-        </p:nvSpPr>
-        <p:spPr>
-          <a:xfrm>
-            <a:off x="1481328" y="4892040"/>
-            <a:ext cx="640080" cy="640080"/>
-          </a:xfrm>
-          <a:prstGeom prst="ellipse">
+            <a:off x="3063240" y="3968496"/>
+            <a:ext cx="310896" cy="292608"/>
+          </a:xfrm>
+          <a:prstGeom prst="downArrow">
             <a:avLst/>
           </a:prstGeom>
           <a:solidFill>
@@ -8168,128 +8073,29 @@
           </a:p>
         </p:txBody>
       </p:sp>
-      <p:pic>
-        <p:nvPicPr>
-          <p:cNvPr id="14" name="Picture 13" descr="files_w.png"/>
-          <p:cNvPicPr>
-            <a:picLocks noChangeAspect="1"/>
-          </p:cNvPicPr>
-          <p:nvPr/>
-        </p:nvPicPr>
-        <p:blipFill>
-          <a:blip r:embed="rId3"/>
-          <a:stretch>
-            <a:fillRect/>
-          </a:stretch>
-        </p:blipFill>
-        <p:spPr>
-          <a:xfrm>
-            <a:off x="1625346" y="5036058"/>
-            <a:ext cx="352044" cy="352044"/>
-          </a:xfrm>
-          <a:prstGeom prst="rect">
-            <a:avLst/>
-          </a:prstGeom>
-        </p:spPr>
-      </p:pic>
-      <p:sp>
-        <p:nvSpPr>
-          <p:cNvPr id="15" name="TextBox 14"/>
-          <p:cNvSpPr txBox="1"/>
-          <p:nvPr/>
-        </p:nvSpPr>
-        <p:spPr>
-          <a:xfrm>
-            <a:off x="2258568" y="4965192"/>
-            <a:ext cx="2788920" cy="457200"/>
-          </a:xfrm>
-          <a:prstGeom prst="rect">
-            <a:avLst/>
-          </a:prstGeom>
-          <a:noFill/>
-        </p:spPr>
-        <p:txBody>
-          <a:bodyPr wrap="square" lIns="45720" tIns="27432" rIns="45720" bIns="27432" anchor="t">
-            <a:spAutoFit/>
-          </a:bodyPr>
-          <a:lstStyle/>
-          <a:p>
-            <a:pPr algn="l"/>
-            <a:r>
-              <a:rPr sz="1500">
-                <a:solidFill>
-                  <a:srgbClr val="262626"/>
-                </a:solidFill>
-                <a:latin typeface="+mj-lt"/>
-              </a:rPr>
-              <a:t>National guidelines</a:t>
-            </a:r>
-          </a:p>
-        </p:txBody>
-      </p:sp>
-      <p:sp>
-        <p:nvSpPr>
-          <p:cNvPr id="16" name="TextBox 15"/>
-          <p:cNvSpPr txBox="1"/>
-          <p:nvPr/>
-        </p:nvSpPr>
-        <p:spPr>
-          <a:xfrm>
-            <a:off x="1572768" y="5577840"/>
-            <a:ext cx="3291840" cy="868680"/>
-          </a:xfrm>
-          <a:prstGeom prst="rect">
-            <a:avLst/>
-          </a:prstGeom>
-          <a:noFill/>
-        </p:spPr>
-        <p:txBody>
-          <a:bodyPr wrap="square" lIns="45720" tIns="27432" rIns="45720" bIns="27432" anchor="t">
-            <a:spAutoFit/>
-          </a:bodyPr>
-          <a:lstStyle/>
-          <a:p>
-            <a:pPr algn="l"/>
-            <a:r>
-              <a:rPr sz="1200">
-                <a:solidFill>
-                  <a:srgbClr val="262626"/>
-                </a:solidFill>
-              </a:rPr>
-              <a:t>Four documents, chunked, embedded, cited by section</a:t>
-            </a:r>
-          </a:p>
-        </p:txBody>
-      </p:sp>
-      <p:sp>
-        <p:nvSpPr>
-          <p:cNvPr id="17" name="Rounded Rectangle 16"/>
+      <p:sp>
+        <p:nvSpPr>
+          <p:cNvPr id="11" name="Rounded Rectangle 10"/>
           <p:cNvSpPr/>
           <p:nvPr/>
         </p:nvSpPr>
         <p:spPr>
           <a:xfrm>
-            <a:off x="1252728" y="6766560"/>
-            <a:ext cx="3931920" cy="1783080"/>
+            <a:off x="1801368" y="4297680"/>
+            <a:ext cx="2834640" cy="475488"/>
           </a:xfrm>
           <a:prstGeom prst="roundRect">
             <a:avLst>
-              <a:gd name="adj" fmla="val 14358"/>
+              <a:gd name="adj" fmla="val 19230"/>
             </a:avLst>
           </a:prstGeom>
           <a:solidFill>
-            <a:srgbClr val="FFFFFF"/>
+            <a:srgbClr val="C4DEFD"/>
           </a:solidFill>
           <a:ln>
             <a:noFill/>
           </a:ln>
-          <a:effectLst>
-            <a:outerShdw blurRad="203200" dist="38100" dir="5400000" algn="ctr" rotWithShape="0">
-              <a:srgbClr val="000000">
-                <a:alpha val="16000"/>
-              </a:srgbClr>
-            </a:outerShdw>
-          </a:effectLst>
+          <a:effectLst/>
         </p:spPr>
         <p:style>
           <a:lnRef idx="1">
@@ -8306,162 +8112,34 @@
           </a:fontRef>
         </p:style>
         <p:txBody>
-          <a:bodyPr rtlCol="0" anchor="ctr"/>
+          <a:bodyPr rtlCol="0" anchor="ctr" wrap="square" lIns="109728" tIns="54864" rIns="109728" bIns="54864"/>
           <a:lstStyle/>
           <a:p>
             <a:pPr algn="ctr"/>
-          </a:p>
-        </p:txBody>
-      </p:sp>
-      <p:sp>
-        <p:nvSpPr>
-          <p:cNvPr id="18" name="Oval 17"/>
+            <a:r>
+              <a:rPr sz="1300">
+                <a:solidFill>
+                  <a:srgbClr val="032954"/>
+                </a:solidFill>
+                <a:latin typeface="+mj-lt"/>
+              </a:rPr>
+              <a:t>Embedding model</a:t>
+            </a:r>
+          </a:p>
+        </p:txBody>
+      </p:sp>
+      <p:sp>
+        <p:nvSpPr>
+          <p:cNvPr id="12" name="Down Arrow 11"/>
           <p:cNvSpPr/>
           <p:nvPr/>
         </p:nvSpPr>
         <p:spPr>
           <a:xfrm>
-            <a:off x="1481328" y="6949440"/>
-            <a:ext cx="640080" cy="640080"/>
-          </a:xfrm>
-          <a:prstGeom prst="ellipse">
-            <a:avLst/>
-          </a:prstGeom>
-          <a:solidFill>
-            <a:srgbClr val="032954"/>
-          </a:solidFill>
-          <a:ln>
-            <a:noFill/>
-          </a:ln>
-          <a:effectLst/>
-        </p:spPr>
-        <p:style>
-          <a:lnRef idx="1">
-            <a:schemeClr val="accent1"/>
-          </a:lnRef>
-          <a:fillRef idx="3">
-            <a:schemeClr val="accent1"/>
-          </a:fillRef>
-          <a:effectRef idx="2">
-            <a:schemeClr val="accent1"/>
-          </a:effectRef>
-          <a:fontRef idx="minor">
-            <a:schemeClr val="lt1"/>
-          </a:fontRef>
-        </p:style>
-        <p:txBody>
-          <a:bodyPr rtlCol="0" anchor="ctr"/>
-          <a:lstStyle/>
-          <a:p>
-            <a:pPr algn="ctr"/>
-          </a:p>
-        </p:txBody>
-      </p:sp>
-      <p:pic>
-        <p:nvPicPr>
-          <p:cNvPr id="19" name="Picture 18" descr="model_w.png"/>
-          <p:cNvPicPr>
-            <a:picLocks noChangeAspect="1"/>
-          </p:cNvPicPr>
-          <p:nvPr/>
-        </p:nvPicPr>
-        <p:blipFill>
-          <a:blip r:embed="rId4"/>
-          <a:stretch>
-            <a:fillRect/>
-          </a:stretch>
-        </p:blipFill>
-        <p:spPr>
-          <a:xfrm>
-            <a:off x="1625346" y="7093458"/>
-            <a:ext cx="352044" cy="352044"/>
-          </a:xfrm>
-          <a:prstGeom prst="rect">
-            <a:avLst/>
-          </a:prstGeom>
-        </p:spPr>
-      </p:pic>
-      <p:sp>
-        <p:nvSpPr>
-          <p:cNvPr id="20" name="TextBox 19"/>
-          <p:cNvSpPr txBox="1"/>
-          <p:nvPr/>
-        </p:nvSpPr>
-        <p:spPr>
-          <a:xfrm>
-            <a:off x="2258568" y="7022592"/>
-            <a:ext cx="2788920" cy="457200"/>
-          </a:xfrm>
-          <a:prstGeom prst="rect">
-            <a:avLst/>
-          </a:prstGeom>
-          <a:noFill/>
-        </p:spPr>
-        <p:txBody>
-          <a:bodyPr wrap="square" lIns="45720" tIns="27432" rIns="45720" bIns="27432" anchor="t">
-            <a:spAutoFit/>
-          </a:bodyPr>
-          <a:lstStyle/>
-          <a:p>
-            <a:pPr algn="l"/>
-            <a:r>
-              <a:rPr sz="1500">
-                <a:solidFill>
-                  <a:srgbClr val="262626"/>
-                </a:solidFill>
-                <a:latin typeface="+mj-lt"/>
-              </a:rPr>
-              <a:t>Deployed models</a:t>
-            </a:r>
-          </a:p>
-        </p:txBody>
-      </p:sp>
-      <p:sp>
-        <p:nvSpPr>
-          <p:cNvPr id="21" name="TextBox 20"/>
-          <p:cNvSpPr txBox="1"/>
-          <p:nvPr/>
-        </p:nvSpPr>
-        <p:spPr>
-          <a:xfrm>
-            <a:off x="1572768" y="7635240"/>
-            <a:ext cx="3291840" cy="868680"/>
-          </a:xfrm>
-          <a:prstGeom prst="rect">
-            <a:avLst/>
-          </a:prstGeom>
-          <a:noFill/>
-        </p:spPr>
-        <p:txBody>
-          <a:bodyPr wrap="square" lIns="45720" tIns="27432" rIns="45720" bIns="27432" anchor="t">
-            <a:spAutoFit/>
-          </a:bodyPr>
-          <a:lstStyle/>
-          <a:p>
-            <a:pPr algn="l"/>
-            <a:r>
-              <a:rPr sz="1200">
-                <a:solidFill>
-                  <a:srgbClr val="262626"/>
-                </a:solidFill>
-              </a:rPr>
-              <a:t>Deterioration risk with drivers, programme simulation, demand forecast</a:t>
-            </a:r>
-          </a:p>
-        </p:txBody>
-      </p:sp>
-      <p:sp>
-        <p:nvSpPr>
-          <p:cNvPr id="22" name="Right Arrow 21"/>
-          <p:cNvSpPr/>
-          <p:nvPr/>
-        </p:nvSpPr>
-        <p:spPr>
-          <a:xfrm>
-            <a:off x="5321808" y="5257800"/>
-            <a:ext cx="731520" cy="411480"/>
-          </a:xfrm>
-          <a:prstGeom prst="rightArrow">
+            <a:off x="3063240" y="4809744"/>
+            <a:ext cx="310896" cy="274320"/>
+          </a:xfrm>
+          <a:prstGeom prst="downArrow">
             <a:avLst/>
           </a:prstGeom>
           <a:solidFill>
@@ -8496,18 +8174,323 @@
       </p:sp>
       <p:sp>
         <p:nvSpPr>
-          <p:cNvPr id="23" name="Rounded Rectangle 22"/>
+          <p:cNvPr id="13" name="Rounded Rectangle 12"/>
           <p:cNvSpPr/>
           <p:nvPr/>
         </p:nvSpPr>
         <p:spPr>
           <a:xfrm>
-            <a:off x="6080760" y="2286000"/>
-            <a:ext cx="6309360" cy="6766560"/>
+            <a:off x="1527048" y="5102352"/>
+            <a:ext cx="3383280" cy="457200"/>
           </a:xfrm>
           <a:prstGeom prst="roundRect">
             <a:avLst>
-              <a:gd name="adj" fmla="val 4057"/>
+              <a:gd name="adj" fmla="val 20000"/>
+            </a:avLst>
+          </a:prstGeom>
+          <a:solidFill>
+            <a:srgbClr val="0766D1"/>
+          </a:solidFill>
+          <a:ln>
+            <a:noFill/>
+          </a:ln>
+          <a:effectLst/>
+        </p:spPr>
+        <p:style>
+          <a:lnRef idx="1">
+            <a:schemeClr val="accent1"/>
+          </a:lnRef>
+          <a:fillRef idx="3">
+            <a:schemeClr val="accent1"/>
+          </a:fillRef>
+          <a:effectRef idx="2">
+            <a:schemeClr val="accent1"/>
+          </a:effectRef>
+          <a:fontRef idx="minor">
+            <a:schemeClr val="lt1"/>
+          </a:fontRef>
+        </p:style>
+        <p:txBody>
+          <a:bodyPr rtlCol="0" anchor="ctr" wrap="square" lIns="109728" tIns="54864" rIns="109728" bIns="54864"/>
+          <a:lstStyle/>
+          <a:p>
+            <a:pPr algn="ctr"/>
+            <a:r>
+              <a:rPr sz="1300">
+                <a:solidFill>
+                  <a:srgbClr val="FFFFFF"/>
+                </a:solidFill>
+                <a:latin typeface="+mj-lt"/>
+              </a:rPr>
+              <a:t>Vector store (RAG)</a:t>
+            </a:r>
+          </a:p>
+        </p:txBody>
+      </p:sp>
+      <p:sp>
+        <p:nvSpPr>
+          <p:cNvPr id="14" name="TextBox 13"/>
+          <p:cNvSpPr txBox="1"/>
+          <p:nvPr/>
+        </p:nvSpPr>
+        <p:spPr>
+          <a:xfrm>
+            <a:off x="1252728" y="5806440"/>
+            <a:ext cx="3931920" cy="365760"/>
+          </a:xfrm>
+          <a:prstGeom prst="rect">
+            <a:avLst/>
+          </a:prstGeom>
+          <a:noFill/>
+        </p:spPr>
+        <p:txBody>
+          <a:bodyPr wrap="square" lIns="45720" tIns="27432" rIns="45720" bIns="27432" anchor="t">
+            <a:spAutoFit/>
+          </a:bodyPr>
+          <a:lstStyle/>
+          <a:p>
+            <a:pPr algn="ctr"/>
+            <a:r>
+              <a:rPr sz="1600">
+                <a:solidFill>
+                  <a:srgbClr val="0766D1"/>
+                </a:solidFill>
+                <a:latin typeface="+mj-lt"/>
+              </a:rPr>
+              <a:t>Structured data</a:t>
+            </a:r>
+          </a:p>
+        </p:txBody>
+      </p:sp>
+      <p:sp>
+        <p:nvSpPr>
+          <p:cNvPr id="15" name="Rounded Rectangle 14"/>
+          <p:cNvSpPr/>
+          <p:nvPr/>
+        </p:nvSpPr>
+        <p:spPr>
+          <a:xfrm>
+            <a:off x="1252728" y="6172200"/>
+            <a:ext cx="3931920" cy="1783080"/>
+          </a:xfrm>
+          <a:prstGeom prst="roundRect">
+            <a:avLst>
+              <a:gd name="adj" fmla="val 12820"/>
+            </a:avLst>
+          </a:prstGeom>
+          <a:noFill/>
+          <a:ln w="15875">
+            <a:solidFill>
+              <a:srgbClr val="0766D1"/>
+            </a:solidFill>
+            <a:prstDash val="sysDot"/>
+          </a:ln>
+          <a:effectLst/>
+        </p:spPr>
+        <p:style>
+          <a:lnRef idx="1">
+            <a:schemeClr val="accent1"/>
+          </a:lnRef>
+          <a:fillRef idx="3">
+            <a:schemeClr val="accent1"/>
+          </a:fillRef>
+          <a:effectRef idx="2">
+            <a:schemeClr val="accent1"/>
+          </a:effectRef>
+          <a:fontRef idx="minor">
+            <a:schemeClr val="lt1"/>
+          </a:fontRef>
+        </p:style>
+        <p:txBody>
+          <a:bodyPr rtlCol="0" anchor="ctr"/>
+          <a:lstStyle/>
+          <a:p>
+            <a:pPr algn="ctr"/>
+          </a:p>
+        </p:txBody>
+      </p:sp>
+      <p:sp>
+        <p:nvSpPr>
+          <p:cNvPr id="16" name="Rounded Rectangle 15"/>
+          <p:cNvSpPr/>
+          <p:nvPr/>
+        </p:nvSpPr>
+        <p:spPr>
+          <a:xfrm>
+            <a:off x="1527048" y="6355080"/>
+            <a:ext cx="3383280" cy="640080"/>
+          </a:xfrm>
+          <a:prstGeom prst="roundRect">
+            <a:avLst>
+              <a:gd name="adj" fmla="val 17142"/>
+            </a:avLst>
+          </a:prstGeom>
+          <a:solidFill>
+            <a:srgbClr val="E4E7EA"/>
+          </a:solidFill>
+          <a:ln>
+            <a:noFill/>
+          </a:ln>
+          <a:effectLst/>
+        </p:spPr>
+        <p:style>
+          <a:lnRef idx="1">
+            <a:schemeClr val="accent1"/>
+          </a:lnRef>
+          <a:fillRef idx="3">
+            <a:schemeClr val="accent1"/>
+          </a:fillRef>
+          <a:effectRef idx="2">
+            <a:schemeClr val="accent1"/>
+          </a:effectRef>
+          <a:fontRef idx="minor">
+            <a:schemeClr val="lt1"/>
+          </a:fontRef>
+        </p:style>
+        <p:txBody>
+          <a:bodyPr rtlCol="0" anchor="ctr" wrap="square" lIns="109728" tIns="54864" rIns="109728" bIns="54864"/>
+          <a:lstStyle/>
+          <a:p>
+            <a:pPr algn="ctr"/>
+            <a:r>
+              <a:rPr sz="1300">
+                <a:solidFill>
+                  <a:srgbClr val="262626"/>
+                </a:solidFill>
+                <a:latin typeface="+mj-lt"/>
+              </a:rPr>
+              <a:t>National HIE  ·  diabetes registry</a:t>
+            </a:r>
+          </a:p>
+        </p:txBody>
+      </p:sp>
+      <p:sp>
+        <p:nvSpPr>
+          <p:cNvPr id="17" name="TextBox 16"/>
+          <p:cNvSpPr txBox="1"/>
+          <p:nvPr/>
+        </p:nvSpPr>
+        <p:spPr>
+          <a:xfrm>
+            <a:off x="1527048" y="7040880"/>
+            <a:ext cx="3383280" cy="685800"/>
+          </a:xfrm>
+          <a:prstGeom prst="rect">
+            <a:avLst/>
+          </a:prstGeom>
+          <a:noFill/>
+        </p:spPr>
+        <p:txBody>
+          <a:bodyPr wrap="square" lIns="45720" tIns="27432" rIns="45720" bIns="27432" anchor="t">
+            <a:spAutoFit/>
+          </a:bodyPr>
+          <a:lstStyle/>
+          <a:p>
+            <a:pPr algn="ctr"/>
+            <a:r>
+              <a:rPr sz="1100">
+                <a:solidFill>
+                  <a:srgbClr val="7E889A"/>
+                </a:solidFill>
+              </a:rPr>
+              <a:t>Patients, encounters, diagnoses, facilities: 4,000 patients, 36 months</a:t>
+            </a:r>
+          </a:p>
+        </p:txBody>
+      </p:sp>
+      <p:sp>
+        <p:nvSpPr>
+          <p:cNvPr id="18" name="TextBox 17"/>
+          <p:cNvSpPr txBox="1"/>
+          <p:nvPr/>
+        </p:nvSpPr>
+        <p:spPr>
+          <a:xfrm>
+            <a:off x="5184648" y="3749039"/>
+            <a:ext cx="1216152" cy="365760"/>
+          </a:xfrm>
+          <a:prstGeom prst="rect">
+            <a:avLst/>
+          </a:prstGeom>
+          <a:noFill/>
+        </p:spPr>
+        <p:txBody>
+          <a:bodyPr wrap="square" lIns="45720" tIns="27432" rIns="45720" bIns="27432" anchor="t">
+            <a:spAutoFit/>
+          </a:bodyPr>
+          <a:lstStyle/>
+          <a:p>
+            <a:pPr algn="ctr"/>
+            <a:r>
+              <a:rPr sz="1200">
+                <a:solidFill>
+                  <a:srgbClr val="0766D1"/>
+                </a:solidFill>
+                <a:latin typeface="+mj-lt"/>
+              </a:rPr>
+              <a:t>Agentic retrieval</a:t>
+            </a:r>
+          </a:p>
+        </p:txBody>
+      </p:sp>
+      <p:sp>
+        <p:nvSpPr>
+          <p:cNvPr id="19" name="Right Arrow 18"/>
+          <p:cNvSpPr/>
+          <p:nvPr/>
+        </p:nvSpPr>
+        <p:spPr>
+          <a:xfrm>
+            <a:off x="5257800" y="4114800"/>
+            <a:ext cx="1069848" cy="329184"/>
+          </a:xfrm>
+          <a:prstGeom prst="rightArrow">
+            <a:avLst/>
+          </a:prstGeom>
+          <a:solidFill>
+            <a:srgbClr val="0766D1"/>
+          </a:solidFill>
+          <a:ln>
+            <a:noFill/>
+          </a:ln>
+          <a:effectLst/>
+        </p:spPr>
+        <p:style>
+          <a:lnRef idx="1">
+            <a:schemeClr val="accent1"/>
+          </a:lnRef>
+          <a:fillRef idx="3">
+            <a:schemeClr val="accent1"/>
+          </a:fillRef>
+          <a:effectRef idx="2">
+            <a:schemeClr val="accent1"/>
+          </a:effectRef>
+          <a:fontRef idx="minor">
+            <a:schemeClr val="lt1"/>
+          </a:fontRef>
+        </p:style>
+        <p:txBody>
+          <a:bodyPr rtlCol="0" anchor="ctr"/>
+          <a:lstStyle/>
+          <a:p>
+            <a:pPr algn="ctr"/>
+          </a:p>
+        </p:txBody>
+      </p:sp>
+      <p:sp>
+        <p:nvSpPr>
+          <p:cNvPr id="20" name="Rounded Rectangle 19"/>
+          <p:cNvSpPr/>
+          <p:nvPr/>
+        </p:nvSpPr>
+        <p:spPr>
+          <a:xfrm>
+            <a:off x="6400800" y="2423160"/>
+            <a:ext cx="4023360" cy="4892040"/>
+          </a:xfrm>
+          <a:prstGeom prst="roundRect">
+            <a:avLst>
+              <a:gd name="adj" fmla="val 6363"/>
             </a:avLst>
           </a:prstGeom>
           <a:solidFill>
@@ -8548,14 +8531,14 @@
       </p:sp>
       <p:sp>
         <p:nvSpPr>
-          <p:cNvPr id="24" name="TextBox 23"/>
+          <p:cNvPr id="21" name="TextBox 20"/>
           <p:cNvSpPr txBox="1"/>
           <p:nvPr/>
         </p:nvSpPr>
         <p:spPr>
           <a:xfrm>
-            <a:off x="6400800" y="2514600"/>
-            <a:ext cx="5669280" cy="457200"/>
+            <a:off x="6675120" y="2651760"/>
+            <a:ext cx="3474720" cy="502920"/>
           </a:xfrm>
           <a:prstGeom prst="rect">
             <a:avLst/>
@@ -8568,7 +8551,7 @@
           </a:bodyPr>
           <a:lstStyle/>
           <a:p>
-            <a:pPr algn="l"/>
+            <a:pPr algn="ctr"/>
             <a:r>
               <a:rPr sz="2000">
                 <a:solidFill>
@@ -8576,60 +8559,24 @@
                 </a:solidFill>
                 <a:latin typeface="+mj-lt"/>
               </a:rPr>
-              <a:t>Basira  ·  supervisor agent</a:t>
-            </a:r>
-          </a:p>
-        </p:txBody>
-      </p:sp>
-      <p:sp>
-        <p:nvSpPr>
-          <p:cNvPr id="25" name="TextBox 24"/>
-          <p:cNvSpPr txBox="1"/>
-          <p:nvPr/>
-        </p:nvSpPr>
-        <p:spPr>
-          <a:xfrm>
-            <a:off x="6400800" y="3017520"/>
-            <a:ext cx="5669280" cy="822960"/>
-          </a:xfrm>
-          <a:prstGeom prst="rect">
-            <a:avLst/>
-          </a:prstGeom>
-          <a:noFill/>
-        </p:spPr>
-        <p:txBody>
-          <a:bodyPr wrap="square" lIns="45720" tIns="27432" rIns="45720" bIns="27432" anchor="t">
-            <a:spAutoFit/>
-          </a:bodyPr>
-          <a:lstStyle/>
-          <a:p>
-            <a:pPr algn="l"/>
-            <a:r>
-              <a:rPr sz="1250">
-                <a:solidFill>
-                  <a:srgbClr val="FFFFFF"/>
-                </a:solidFill>
-              </a:rPr>
-              <a:t>Reads the question, picks the specialists, writes the cited answer and draws the chart. English or Arabic, text or voice.</a:t>
-            </a:r>
-          </a:p>
-        </p:txBody>
-      </p:sp>
-      <p:sp>
-        <p:nvSpPr>
-          <p:cNvPr id="26" name="Rounded Rectangle 25"/>
+              <a:t>Population Health Agent</a:t>
+            </a:r>
+          </a:p>
+        </p:txBody>
+      </p:sp>
+      <p:sp>
+        <p:nvSpPr>
+          <p:cNvPr id="22" name="Rectangle 21"/>
           <p:cNvSpPr/>
           <p:nvPr/>
         </p:nvSpPr>
         <p:spPr>
           <a:xfrm>
-            <a:off x="6400800" y="3977639"/>
-            <a:ext cx="5669280" cy="841248"/>
-          </a:xfrm>
-          <a:prstGeom prst="roundRect">
-            <a:avLst>
-              <a:gd name="adj" fmla="val 16304"/>
-            </a:avLst>
+            <a:off x="7223760" y="3200400"/>
+            <a:ext cx="2377440" cy="27432"/>
+          </a:xfrm>
+          <a:prstGeom prst="rect">
+            <a:avLst/>
           </a:prstGeom>
           <a:solidFill>
             <a:srgbClr val="FFFFFF"/>
@@ -8654,51 +8601,65 @@
           </a:fontRef>
         </p:style>
         <p:txBody>
-          <a:bodyPr rtlCol="0" anchor="ctr" wrap="square" lIns="182880" tIns="36576" rIns="182880" bIns="36576"/>
-          <a:lstStyle/>
-          <a:p>
-            <a:pPr algn="l"/>
-            <a:r>
-              <a:rPr sz="1300">
-                <a:solidFill>
-                  <a:srgbClr val="032954"/>
-                </a:solidFill>
-                <a:latin typeface="+mj-lt"/>
-              </a:rPr>
-              <a:t>Cohort specialist  </a:t>
-            </a:r>
-          </a:p>
-          <a:p>
-            <a:pPr algn="l"/>
-            <a:r>
-              <a:rPr sz="1200">
-                <a:solidFill>
-                  <a:srgbClr val="262626"/>
-                </a:solidFill>
-              </a:rPr>
-              <a:t>queries the exchange: records, timelines, cohort filters</a:t>
-            </a:r>
-          </a:p>
-        </p:txBody>
-      </p:sp>
-      <p:sp>
-        <p:nvSpPr>
-          <p:cNvPr id="27" name="Rounded Rectangle 26"/>
+          <a:bodyPr rtlCol="0" anchor="ctr"/>
+          <a:lstStyle/>
+          <a:p>
+            <a:pPr algn="ctr"/>
+          </a:p>
+        </p:txBody>
+      </p:sp>
+      <p:sp>
+        <p:nvSpPr>
+          <p:cNvPr id="23" name="TextBox 22"/>
+          <p:cNvSpPr txBox="1"/>
+          <p:nvPr/>
+        </p:nvSpPr>
+        <p:spPr>
+          <a:xfrm>
+            <a:off x="6675120" y="3337560"/>
+            <a:ext cx="3474720" cy="1325880"/>
+          </a:xfrm>
+          <a:prstGeom prst="rect">
+            <a:avLst/>
+          </a:prstGeom>
+          <a:noFill/>
+        </p:spPr>
+        <p:txBody>
+          <a:bodyPr wrap="square" lIns="45720" tIns="27432" rIns="45720" bIns="27432" anchor="t">
+            <a:spAutoFit/>
+          </a:bodyPr>
+          <a:lstStyle/>
+          <a:p>
+            <a:pPr algn="ctr"/>
+            <a:r>
+              <a:rPr sz="1400">
+                <a:solidFill>
+                  <a:srgbClr val="FFFFFF"/>
+                </a:solidFill>
+              </a:rPr>
+              <a:t>Patient-level questions, population insights, cost and policy what-ifs, with cited, traceable reasoning. English or Arabic.</a:t>
+            </a:r>
+          </a:p>
+        </p:txBody>
+      </p:sp>
+      <p:sp>
+        <p:nvSpPr>
+          <p:cNvPr id="24" name="Rounded Rectangle 23"/>
           <p:cNvSpPr/>
           <p:nvPr/>
         </p:nvSpPr>
         <p:spPr>
           <a:xfrm>
-            <a:off x="6400800" y="4965192"/>
-            <a:ext cx="5669280" cy="841248"/>
+            <a:off x="6675120" y="4800600"/>
+            <a:ext cx="3474720" cy="2286000"/>
           </a:xfrm>
           <a:prstGeom prst="roundRect">
             <a:avLst>
-              <a:gd name="adj" fmla="val 16304"/>
+              <a:gd name="adj" fmla="val 7199"/>
             </a:avLst>
           </a:prstGeom>
           <a:solidFill>
-            <a:srgbClr val="FFFFFF"/>
+            <a:srgbClr val="EAF3FE"/>
           </a:solidFill>
           <a:ln>
             <a:noFill/>
@@ -8720,241 +8681,106 @@
           </a:fontRef>
         </p:style>
         <p:txBody>
-          <a:bodyPr rtlCol="0" anchor="ctr" wrap="square" lIns="182880" tIns="36576" rIns="182880" bIns="36576"/>
-          <a:lstStyle/>
-          <a:p>
-            <a:pPr algn="l"/>
+          <a:bodyPr rtlCol="0" anchor="ctr"/>
+          <a:lstStyle/>
+          <a:p>
+            <a:pPr algn="ctr"/>
+          </a:p>
+        </p:txBody>
+      </p:sp>
+      <p:sp>
+        <p:nvSpPr>
+          <p:cNvPr id="25" name="TextBox 24"/>
+          <p:cNvSpPr txBox="1"/>
+          <p:nvPr/>
+        </p:nvSpPr>
+        <p:spPr>
+          <a:xfrm>
+            <a:off x="6858000" y="4937760"/>
+            <a:ext cx="3108960" cy="2057400"/>
+          </a:xfrm>
+          <a:prstGeom prst="rect">
+            <a:avLst/>
+          </a:prstGeom>
+          <a:noFill/>
+        </p:spPr>
+        <p:txBody>
+          <a:bodyPr wrap="square" lIns="45720" tIns="27432" rIns="45720" bIns="27432" anchor="ctr">
+            <a:spAutoFit/>
+          </a:bodyPr>
+          <a:lstStyle/>
+          <a:p>
+            <a:pPr algn="l" marL="237744" indent="-237744">
+              <a:spcBef>
+                <a:spcPts val="0"/>
+              </a:spcBef>
+              <a:buClr>
+                <a:srgbClr val="0766D1"/>
+              </a:buClr>
+              <a:buFont typeface="Arial"/>
+              <a:buChar char="•"/>
+            </a:pPr>
             <a:r>
               <a:rPr sz="1300">
                 <a:solidFill>
                   <a:srgbClr val="032954"/>
                 </a:solidFill>
-                <a:latin typeface="+mj-lt"/>
-              </a:rPr>
-              <a:t>Guideline specialist  </a:t>
-            </a:r>
-          </a:p>
-          <a:p>
-            <a:pPr algn="l"/>
-            <a:r>
-              <a:rPr sz="1200">
-                <a:solidFill>
-                  <a:srgbClr val="262626"/>
-                </a:solidFill>
-              </a:rPr>
-              <a:t>retrieves and cites guideline sections (RAG)</a:t>
-            </a:r>
-          </a:p>
-        </p:txBody>
-      </p:sp>
-      <p:sp>
-        <p:nvSpPr>
-          <p:cNvPr id="28" name="Rounded Rectangle 27"/>
+              </a:rPr>
+              <a:t>Orchestrator: a supervisor sends five specialists to work</a:t>
+            </a:r>
+          </a:p>
+          <a:p>
+            <a:pPr algn="l" marL="237744" indent="-237744">
+              <a:spcBef>
+                <a:spcPts val="400"/>
+              </a:spcBef>
+              <a:buClr>
+                <a:srgbClr val="0766D1"/>
+              </a:buClr>
+              <a:buFont typeface="Arial"/>
+              <a:buChar char="•"/>
+            </a:pPr>
+            <a:r>
+              <a:rPr sz="1300">
+                <a:solidFill>
+                  <a:srgbClr val="032954"/>
+                </a:solidFill>
+              </a:rPr>
+              <a:t>Guideline grounding: every clinical statement cites its section</a:t>
+            </a:r>
+          </a:p>
+          <a:p>
+            <a:pPr algn="l" marL="237744" indent="-237744">
+              <a:spcBef>
+                <a:spcPts val="400"/>
+              </a:spcBef>
+              <a:buClr>
+                <a:srgbClr val="0766D1"/>
+              </a:buClr>
+              <a:buFont typeface="Arial"/>
+              <a:buChar char="•"/>
+            </a:pPr>
+            <a:r>
+              <a:rPr sz="1300">
+                <a:solidFill>
+                  <a:srgbClr val="032954"/>
+                </a:solidFill>
+              </a:rPr>
+              <a:t>Audit log: every call on record, next to the answer</a:t>
+            </a:r>
+          </a:p>
+        </p:txBody>
+      </p:sp>
+      <p:sp>
+        <p:nvSpPr>
+          <p:cNvPr id="26" name="Right Arrow 25"/>
           <p:cNvSpPr/>
           <p:nvPr/>
         </p:nvSpPr>
         <p:spPr>
           <a:xfrm>
-            <a:off x="6400800" y="5952744"/>
-            <a:ext cx="5669280" cy="841248"/>
-          </a:xfrm>
-          <a:prstGeom prst="roundRect">
-            <a:avLst>
-              <a:gd name="adj" fmla="val 16304"/>
-            </a:avLst>
-          </a:prstGeom>
-          <a:solidFill>
-            <a:srgbClr val="FFFFFF"/>
-          </a:solidFill>
-          <a:ln>
-            <a:noFill/>
-          </a:ln>
-          <a:effectLst/>
-        </p:spPr>
-        <p:style>
-          <a:lnRef idx="1">
-            <a:schemeClr val="accent1"/>
-          </a:lnRef>
-          <a:fillRef idx="3">
-            <a:schemeClr val="accent1"/>
-          </a:fillRef>
-          <a:effectRef idx="2">
-            <a:schemeClr val="accent1"/>
-          </a:effectRef>
-          <a:fontRef idx="minor">
-            <a:schemeClr val="lt1"/>
-          </a:fontRef>
-        </p:style>
-        <p:txBody>
-          <a:bodyPr rtlCol="0" anchor="ctr" wrap="square" lIns="182880" tIns="36576" rIns="182880" bIns="36576"/>
-          <a:lstStyle/>
-          <a:p>
-            <a:pPr algn="l"/>
-            <a:r>
-              <a:rPr sz="1300">
-                <a:solidFill>
-                  <a:srgbClr val="032954"/>
-                </a:solidFill>
-                <a:latin typeface="+mj-lt"/>
-              </a:rPr>
-              <a:t>Risk specialist  </a:t>
-            </a:r>
-          </a:p>
-          <a:p>
-            <a:pPr algn="l"/>
-            <a:r>
-              <a:rPr sz="1200">
-                <a:solidFill>
-                  <a:srgbClr val="262626"/>
-                </a:solidFill>
-              </a:rPr>
-              <a:t>scores the deployed models, explains the drivers, simulates programmes</a:t>
-            </a:r>
-          </a:p>
-        </p:txBody>
-      </p:sp>
-      <p:sp>
-        <p:nvSpPr>
-          <p:cNvPr id="29" name="Rounded Rectangle 28"/>
-          <p:cNvSpPr/>
-          <p:nvPr/>
-        </p:nvSpPr>
-        <p:spPr>
-          <a:xfrm>
-            <a:off x="6400800" y="6940296"/>
-            <a:ext cx="5669280" cy="841248"/>
-          </a:xfrm>
-          <a:prstGeom prst="roundRect">
-            <a:avLst>
-              <a:gd name="adj" fmla="val 16304"/>
-            </a:avLst>
-          </a:prstGeom>
-          <a:solidFill>
-            <a:srgbClr val="FFFFFF"/>
-          </a:solidFill>
-          <a:ln>
-            <a:noFill/>
-          </a:ln>
-          <a:effectLst/>
-        </p:spPr>
-        <p:style>
-          <a:lnRef idx="1">
-            <a:schemeClr val="accent1"/>
-          </a:lnRef>
-          <a:fillRef idx="3">
-            <a:schemeClr val="accent1"/>
-          </a:fillRef>
-          <a:effectRef idx="2">
-            <a:schemeClr val="accent1"/>
-          </a:effectRef>
-          <a:fontRef idx="minor">
-            <a:schemeClr val="lt1"/>
-          </a:fontRef>
-        </p:style>
-        <p:txBody>
-          <a:bodyPr rtlCol="0" anchor="ctr" wrap="square" lIns="182880" tIns="36576" rIns="182880" bIns="36576"/>
-          <a:lstStyle/>
-          <a:p>
-            <a:pPr algn="l"/>
-            <a:r>
-              <a:rPr sz="1300">
-                <a:solidFill>
-                  <a:srgbClr val="032954"/>
-                </a:solidFill>
-                <a:latin typeface="+mj-lt"/>
-              </a:rPr>
-              <a:t>Population-health specialist  </a:t>
-            </a:r>
-          </a:p>
-          <a:p>
-            <a:pPr algn="l"/>
-            <a:r>
-              <a:rPr sz="1200">
-                <a:solidFill>
-                  <a:srgbClr val="262626"/>
-                </a:solidFill>
-              </a:rPr>
-              <a:t>quality measures, care gaps, policy what-ifs, over an MCP server</a:t>
-            </a:r>
-          </a:p>
-        </p:txBody>
-      </p:sp>
-      <p:sp>
-        <p:nvSpPr>
-          <p:cNvPr id="30" name="Rounded Rectangle 29"/>
-          <p:cNvSpPr/>
-          <p:nvPr/>
-        </p:nvSpPr>
-        <p:spPr>
-          <a:xfrm>
-            <a:off x="6400800" y="7927848"/>
-            <a:ext cx="5669280" cy="841248"/>
-          </a:xfrm>
-          <a:prstGeom prst="roundRect">
-            <a:avLst>
-              <a:gd name="adj" fmla="val 16304"/>
-            </a:avLst>
-          </a:prstGeom>
-          <a:solidFill>
-            <a:srgbClr val="FFFFFF"/>
-          </a:solidFill>
-          <a:ln>
-            <a:noFill/>
-          </a:ln>
-          <a:effectLst/>
-        </p:spPr>
-        <p:style>
-          <a:lnRef idx="1">
-            <a:schemeClr val="accent1"/>
-          </a:lnRef>
-          <a:fillRef idx="3">
-            <a:schemeClr val="accent1"/>
-          </a:fillRef>
-          <a:effectRef idx="2">
-            <a:schemeClr val="accent1"/>
-          </a:effectRef>
-          <a:fontRef idx="minor">
-            <a:schemeClr val="lt1"/>
-          </a:fontRef>
-        </p:style>
-        <p:txBody>
-          <a:bodyPr rtlCol="0" anchor="ctr" wrap="square" lIns="182880" tIns="36576" rIns="182880" bIns="36576"/>
-          <a:lstStyle/>
-          <a:p>
-            <a:pPr algn="l"/>
-            <a:r>
-              <a:rPr sz="1300">
-                <a:solidFill>
-                  <a:srgbClr val="032954"/>
-                </a:solidFill>
-                <a:latin typeface="+mj-lt"/>
-              </a:rPr>
-              <a:t>Action specialist  </a:t>
-            </a:r>
-          </a:p>
-          <a:p>
-            <a:pPr algn="l"/>
-            <a:r>
-              <a:rPr sz="1200">
-                <a:solidFill>
-                  <a:srgbClr val="262626"/>
-                </a:solidFill>
-              </a:rPr>
-              <a:t>drafts prescriptions, recalls and referrals, for approval only</a:t>
-            </a:r>
-          </a:p>
-        </p:txBody>
-      </p:sp>
-      <p:sp>
-        <p:nvSpPr>
-          <p:cNvPr id="31" name="Right Arrow 30"/>
-          <p:cNvSpPr/>
-          <p:nvPr/>
-        </p:nvSpPr>
-        <p:spPr>
-          <a:xfrm>
-            <a:off x="12527280" y="5257800"/>
-            <a:ext cx="731520" cy="411480"/>
+            <a:off x="10497312" y="4114800"/>
+            <a:ext cx="676656" cy="329184"/>
           </a:xfrm>
           <a:prstGeom prst="rightArrow">
             <a:avLst/>
@@ -8991,57 +8817,22 @@
       </p:sp>
       <p:sp>
         <p:nvSpPr>
-          <p:cNvPr id="32" name="TextBox 31"/>
-          <p:cNvSpPr txBox="1"/>
-          <p:nvPr/>
-        </p:nvSpPr>
-        <p:spPr>
-          <a:xfrm>
-            <a:off x="13075920" y="2286000"/>
-            <a:ext cx="3950208" cy="274320"/>
-          </a:xfrm>
-          <a:prstGeom prst="rect">
-            <a:avLst/>
-          </a:prstGeom>
-          <a:noFill/>
-        </p:spPr>
-        <p:txBody>
-          <a:bodyPr wrap="square" lIns="45720" tIns="27432" rIns="45720" bIns="27432" anchor="t">
-            <a:spAutoFit/>
-          </a:bodyPr>
-          <a:lstStyle/>
-          <a:p>
-            <a:pPr algn="l"/>
-            <a:r>
-              <a:rPr sz="1050">
-                <a:solidFill>
-                  <a:srgbClr val="0766D1"/>
-                </a:solidFill>
-                <a:latin typeface="+mj-lt"/>
-              </a:rPr>
-              <a:t>WHAT COMES OUT</a:t>
-            </a:r>
-          </a:p>
-        </p:txBody>
-      </p:sp>
-      <p:sp>
-        <p:nvSpPr>
-          <p:cNvPr id="33" name="Rounded Rectangle 32"/>
+          <p:cNvPr id="27" name="Rounded Rectangle 26"/>
           <p:cNvSpPr/>
           <p:nvPr/>
         </p:nvSpPr>
         <p:spPr>
           <a:xfrm>
-            <a:off x="13075920" y="2651760"/>
-            <a:ext cx="3950208" cy="1417320"/>
+            <a:off x="11247120" y="3200400"/>
+            <a:ext cx="2103120" cy="2103120"/>
           </a:xfrm>
           <a:prstGeom prst="roundRect">
             <a:avLst>
-              <a:gd name="adj" fmla="val 18064"/>
+              <a:gd name="adj" fmla="val 13043"/>
             </a:avLst>
           </a:prstGeom>
           <a:solidFill>
-            <a:srgbClr val="FFFFFF"/>
+            <a:srgbClr val="C4DEFD"/>
           </a:solidFill>
           <a:ln>
             <a:noFill/>
@@ -9076,68 +8867,24 @@
           </a:p>
         </p:txBody>
       </p:sp>
-      <p:sp>
-        <p:nvSpPr>
-          <p:cNvPr id="34" name="Oval 33"/>
-          <p:cNvSpPr/>
-          <p:nvPr/>
-        </p:nvSpPr>
-        <p:spPr>
-          <a:xfrm>
-            <a:off x="13258800" y="2788920"/>
-            <a:ext cx="548640" cy="548640"/>
-          </a:xfrm>
-          <a:prstGeom prst="ellipse">
-            <a:avLst/>
-          </a:prstGeom>
-          <a:solidFill>
-            <a:srgbClr val="0766D1"/>
-          </a:solidFill>
-          <a:ln>
-            <a:noFill/>
-          </a:ln>
-          <a:effectLst/>
-        </p:spPr>
-        <p:style>
-          <a:lnRef idx="1">
-            <a:schemeClr val="accent1"/>
-          </a:lnRef>
-          <a:fillRef idx="3">
-            <a:schemeClr val="accent1"/>
-          </a:fillRef>
-          <a:effectRef idx="2">
-            <a:schemeClr val="accent1"/>
-          </a:effectRef>
-          <a:fontRef idx="minor">
-            <a:schemeClr val="lt1"/>
-          </a:fontRef>
-        </p:style>
-        <p:txBody>
-          <a:bodyPr rtlCol="0" anchor="ctr"/>
-          <a:lstStyle/>
-          <a:p>
-            <a:pPr algn="ctr"/>
-          </a:p>
-        </p:txBody>
-      </p:sp>
       <p:pic>
         <p:nvPicPr>
-          <p:cNvPr id="35" name="Picture 34" descr="cite_w.png"/>
+          <p:cNvPr id="28" name="Picture 27" descr="usb_n.png"/>
           <p:cNvPicPr>
             <a:picLocks noChangeAspect="1"/>
           </p:cNvPicPr>
           <p:nvPr/>
         </p:nvPicPr>
         <p:blipFill>
-          <a:blip r:embed="rId5"/>
+          <a:blip r:embed="rId2"/>
           <a:stretch>
             <a:fillRect/>
           </a:stretch>
         </p:blipFill>
         <p:spPr>
           <a:xfrm>
-            <a:off x="13382244" y="2912364"/>
-            <a:ext cx="301752" cy="301752"/>
+            <a:off x="11932920" y="3474720"/>
+            <a:ext cx="731520" cy="731520"/>
           </a:xfrm>
           <a:prstGeom prst="rect">
             <a:avLst/>
@@ -9146,14 +8893,14 @@
       </p:pic>
       <p:sp>
         <p:nvSpPr>
-          <p:cNvPr id="36" name="TextBox 35"/>
+          <p:cNvPr id="29" name="TextBox 28"/>
           <p:cNvSpPr txBox="1"/>
           <p:nvPr/>
         </p:nvSpPr>
         <p:spPr>
           <a:xfrm>
-            <a:off x="13944600" y="2834640"/>
-            <a:ext cx="2944368" cy="457200"/>
+            <a:off x="11247120" y="4297680"/>
+            <a:ext cx="2103120" cy="822960"/>
           </a:xfrm>
           <a:prstGeom prst="rect">
             <a:avLst/>
@@ -9166,29 +8913,40 @@
           </a:bodyPr>
           <a:lstStyle/>
           <a:p>
-            <a:pPr algn="l"/>
-            <a:r>
-              <a:rPr sz="1350">
-                <a:solidFill>
-                  <a:srgbClr val="262626"/>
+            <a:pPr algn="ctr"/>
+            <a:r>
+              <a:rPr sz="1800">
+                <a:solidFill>
+                  <a:srgbClr val="032954"/>
                 </a:solidFill>
                 <a:latin typeface="+mj-lt"/>
               </a:rPr>
-              <a:t>A cited answer and a chart</a:t>
-            </a:r>
-          </a:p>
-        </p:txBody>
-      </p:sp>
-      <p:sp>
-        <p:nvSpPr>
-          <p:cNvPr id="37" name="TextBox 36"/>
+              <a:t>MCP server</a:t>
+            </a:r>
+          </a:p>
+          <a:p>
+            <a:pPr algn="ctr"/>
+            <a:r>
+              <a:rPr sz="1100">
+                <a:solidFill>
+                  <a:srgbClr val="032954"/>
+                </a:solidFill>
+              </a:rPr>
+              <a:t>one plug, every tool</a:t>
+            </a:r>
+          </a:p>
+        </p:txBody>
+      </p:sp>
+      <p:sp>
+        <p:nvSpPr>
+          <p:cNvPr id="30" name="TextBox 29"/>
           <p:cNvSpPr txBox="1"/>
           <p:nvPr/>
         </p:nvSpPr>
         <p:spPr>
           <a:xfrm>
-            <a:off x="13350240" y="3310128"/>
-            <a:ext cx="3493008" cy="731520"/>
+            <a:off x="14081760" y="2286000"/>
+            <a:ext cx="2944368" cy="365760"/>
           </a:xfrm>
           <a:prstGeom prst="rect">
             <a:avLst/>
@@ -9201,36 +8959,37 @@
           </a:bodyPr>
           <a:lstStyle/>
           <a:p>
-            <a:pPr algn="l"/>
-            <a:r>
-              <a:rPr sz="1150">
-                <a:solidFill>
-                  <a:srgbClr val="262626"/>
-                </a:solidFill>
-              </a:rPr>
-              <a:t>Every number with its cohort, every clinical statement with its section</a:t>
-            </a:r>
-          </a:p>
-        </p:txBody>
-      </p:sp>
-      <p:sp>
-        <p:nvSpPr>
-          <p:cNvPr id="38" name="Rounded Rectangle 37"/>
+            <a:pPr algn="ctr"/>
+            <a:r>
+              <a:rPr sz="1600">
+                <a:solidFill>
+                  <a:srgbClr val="0766D1"/>
+                </a:solidFill>
+                <a:latin typeface="+mj-lt"/>
+              </a:rPr>
+              <a:t>Tools</a:t>
+            </a:r>
+          </a:p>
+        </p:txBody>
+      </p:sp>
+      <p:sp>
+        <p:nvSpPr>
+          <p:cNvPr id="31" name="Rounded Rectangle 30"/>
           <p:cNvSpPr/>
           <p:nvPr/>
         </p:nvSpPr>
         <p:spPr>
           <a:xfrm>
-            <a:off x="13075920" y="4279392"/>
-            <a:ext cx="3950208" cy="1417320"/>
+            <a:off x="14081760" y="2788920"/>
+            <a:ext cx="2944368" cy="658368"/>
           </a:xfrm>
           <a:prstGeom prst="roundRect">
             <a:avLst>
-              <a:gd name="adj" fmla="val 18064"/>
+              <a:gd name="adj" fmla="val 13888"/>
             </a:avLst>
           </a:prstGeom>
           <a:solidFill>
-            <a:srgbClr val="FFFFFF"/>
+            <a:srgbClr val="7E889A"/>
           </a:solidFill>
           <a:ln>
             <a:noFill/>
@@ -9258,168 +9017,77 @@
           </a:fontRef>
         </p:style>
         <p:txBody>
-          <a:bodyPr rtlCol="0" anchor="ctr"/>
+          <a:bodyPr rtlCol="0" anchor="ctr" wrap="square" tIns="27432" bIns="27432"/>
           <a:lstStyle/>
           <a:p>
             <a:pPr algn="ctr"/>
-          </a:p>
-        </p:txBody>
-      </p:sp>
-      <p:sp>
-        <p:nvSpPr>
-          <p:cNvPr id="39" name="Oval 38"/>
-          <p:cNvSpPr/>
-          <p:nvPr/>
-        </p:nvSpPr>
-        <p:spPr>
-          <a:xfrm>
-            <a:off x="13258800" y="4416552"/>
-            <a:ext cx="548640" cy="548640"/>
-          </a:xfrm>
-          <a:prstGeom prst="ellipse">
-            <a:avLst/>
-          </a:prstGeom>
-          <a:solidFill>
-            <a:srgbClr val="0766D1"/>
-          </a:solidFill>
-          <a:ln>
-            <a:noFill/>
+            <a:r>
+              <a:rPr sz="1200">
+                <a:solidFill>
+                  <a:srgbClr val="FFFFFF"/>
+                </a:solidFill>
+                <a:latin typeface="+mj-lt"/>
+              </a:rPr>
+              <a:t>Score &amp; simulate (deployed ML models)</a:t>
+            </a:r>
+          </a:p>
+        </p:txBody>
+      </p:sp>
+      <p:cxnSp>
+        <p:nvCxnSpPr>
+          <p:cNvPr id="32" name="Connector 31"/>
+          <p:cNvCxnSpPr/>
+          <p:nvPr/>
+        </p:nvCxnSpPr>
+        <p:spPr>
+          <a:xfrm flipV="1">
+            <a:off x="13386816" y="3118103"/>
+            <a:ext cx="649224" cy="1133857"/>
+          </a:xfrm>
+          <a:prstGeom prst="line">
+            <a:avLst/>
+          </a:prstGeom>
+          <a:ln w="19050">
+            <a:solidFill>
+              <a:srgbClr val="0766D1"/>
+            </a:solidFill>
+            <a:tailEnd type="triangle" w="med" len="med"/>
           </a:ln>
           <a:effectLst/>
         </p:spPr>
         <p:style>
-          <a:lnRef idx="1">
+          <a:lnRef idx="2">
             <a:schemeClr val="accent1"/>
           </a:lnRef>
-          <a:fillRef idx="3">
+          <a:fillRef idx="0">
             <a:schemeClr val="accent1"/>
           </a:fillRef>
-          <a:effectRef idx="2">
+          <a:effectRef idx="1">
             <a:schemeClr val="accent1"/>
           </a:effectRef>
           <a:fontRef idx="minor">
-            <a:schemeClr val="lt1"/>
+            <a:schemeClr val="tx1"/>
           </a:fontRef>
         </p:style>
-        <p:txBody>
-          <a:bodyPr rtlCol="0" anchor="ctr"/>
-          <a:lstStyle/>
-          <a:p>
-            <a:pPr algn="ctr"/>
-          </a:p>
-        </p:txBody>
-      </p:sp>
-      <p:pic>
-        <p:nvPicPr>
-          <p:cNvPr id="40" name="Picture 39" descr="inbox_w.png"/>
-          <p:cNvPicPr>
-            <a:picLocks noChangeAspect="1"/>
-          </p:cNvPicPr>
-          <p:nvPr/>
-        </p:nvPicPr>
-        <p:blipFill>
-          <a:blip r:embed="rId6"/>
-          <a:stretch>
-            <a:fillRect/>
-          </a:stretch>
-        </p:blipFill>
-        <p:spPr>
-          <a:xfrm>
-            <a:off x="13382244" y="4539996"/>
-            <a:ext cx="301752" cy="301752"/>
-          </a:xfrm>
-          <a:prstGeom prst="rect">
-            <a:avLst/>
-          </a:prstGeom>
-        </p:spPr>
-      </p:pic>
-      <p:sp>
-        <p:nvSpPr>
-          <p:cNvPr id="41" name="TextBox 40"/>
-          <p:cNvSpPr txBox="1"/>
-          <p:nvPr/>
-        </p:nvSpPr>
-        <p:spPr>
-          <a:xfrm>
-            <a:off x="13944600" y="4462272"/>
-            <a:ext cx="2944368" cy="457200"/>
-          </a:xfrm>
-          <a:prstGeom prst="rect">
-            <a:avLst/>
-          </a:prstGeom>
-          <a:noFill/>
-        </p:spPr>
-        <p:txBody>
-          <a:bodyPr wrap="square" lIns="45720" tIns="27432" rIns="45720" bIns="27432" anchor="t">
-            <a:spAutoFit/>
-          </a:bodyPr>
-          <a:lstStyle/>
-          <a:p>
-            <a:pPr algn="l"/>
-            <a:r>
-              <a:rPr sz="1350">
-                <a:solidFill>
-                  <a:srgbClr val="262626"/>
-                </a:solidFill>
-                <a:latin typeface="+mj-lt"/>
-              </a:rPr>
-              <a:t>A draft, never an action</a:t>
-            </a:r>
-          </a:p>
-        </p:txBody>
-      </p:sp>
-      <p:sp>
-        <p:nvSpPr>
-          <p:cNvPr id="42" name="TextBox 41"/>
-          <p:cNvSpPr txBox="1"/>
-          <p:nvPr/>
-        </p:nvSpPr>
-        <p:spPr>
-          <a:xfrm>
-            <a:off x="13350240" y="4937759"/>
-            <a:ext cx="3493008" cy="731520"/>
-          </a:xfrm>
-          <a:prstGeom prst="rect">
-            <a:avLst/>
-          </a:prstGeom>
-          <a:noFill/>
-        </p:spPr>
-        <p:txBody>
-          <a:bodyPr wrap="square" lIns="45720" tIns="27432" rIns="45720" bIns="27432" anchor="t">
-            <a:spAutoFit/>
-          </a:bodyPr>
-          <a:lstStyle/>
-          <a:p>
-            <a:pPr algn="l"/>
-            <a:r>
-              <a:rPr sz="1150">
-                <a:solidFill>
-                  <a:srgbClr val="262626"/>
-                </a:solidFill>
-              </a:rPr>
-              <a:t>Prescriptions, recall lists and referrals land in an approval queue</a:t>
-            </a:r>
-          </a:p>
-        </p:txBody>
-      </p:sp>
-      <p:sp>
-        <p:nvSpPr>
-          <p:cNvPr id="43" name="Rounded Rectangle 42"/>
+      </p:cxnSp>
+      <p:sp>
+        <p:nvSpPr>
+          <p:cNvPr id="33" name="Rounded Rectangle 32"/>
           <p:cNvSpPr/>
           <p:nvPr/>
         </p:nvSpPr>
         <p:spPr>
           <a:xfrm>
-            <a:off x="13075920" y="5907024"/>
-            <a:ext cx="3950208" cy="1417320"/>
+            <a:off x="14081760" y="3648456"/>
+            <a:ext cx="2944368" cy="658368"/>
           </a:xfrm>
           <a:prstGeom prst="roundRect">
             <a:avLst>
-              <a:gd name="adj" fmla="val 18064"/>
+              <a:gd name="adj" fmla="val 13888"/>
             </a:avLst>
           </a:prstGeom>
           <a:solidFill>
-            <a:srgbClr val="FFFFFF"/>
+            <a:srgbClr val="C4DEFD"/>
           </a:solidFill>
           <a:ln>
             <a:noFill/>
@@ -9447,168 +9115,77 @@
           </a:fontRef>
         </p:style>
         <p:txBody>
-          <a:bodyPr rtlCol="0" anchor="ctr"/>
+          <a:bodyPr rtlCol="0" anchor="ctr" wrap="square" tIns="27432" bIns="27432"/>
           <a:lstStyle/>
           <a:p>
             <a:pPr algn="ctr"/>
-          </a:p>
-        </p:txBody>
-      </p:sp>
-      <p:sp>
-        <p:nvSpPr>
-          <p:cNvPr id="44" name="Oval 43"/>
-          <p:cNvSpPr/>
-          <p:nvPr/>
-        </p:nvSpPr>
-        <p:spPr>
-          <a:xfrm>
-            <a:off x="13258800" y="6044184"/>
-            <a:ext cx="548640" cy="548640"/>
-          </a:xfrm>
-          <a:prstGeom prst="ellipse">
-            <a:avLst/>
-          </a:prstGeom>
-          <a:solidFill>
-            <a:srgbClr val="032954"/>
-          </a:solidFill>
-          <a:ln>
-            <a:noFill/>
+            <a:r>
+              <a:rPr sz="1200">
+                <a:solidFill>
+                  <a:srgbClr val="032954"/>
+                </a:solidFill>
+                <a:latin typeface="+mj-lt"/>
+              </a:rPr>
+              <a:t>Quality measures &amp; care gaps</a:t>
+            </a:r>
+          </a:p>
+        </p:txBody>
+      </p:sp>
+      <p:cxnSp>
+        <p:nvCxnSpPr>
+          <p:cNvPr id="34" name="Connector 33"/>
+          <p:cNvCxnSpPr/>
+          <p:nvPr/>
+        </p:nvCxnSpPr>
+        <p:spPr>
+          <a:xfrm flipV="1">
+            <a:off x="13386816" y="3977639"/>
+            <a:ext cx="649224" cy="274321"/>
+          </a:xfrm>
+          <a:prstGeom prst="line">
+            <a:avLst/>
+          </a:prstGeom>
+          <a:ln w="19050">
+            <a:solidFill>
+              <a:srgbClr val="0766D1"/>
+            </a:solidFill>
+            <a:tailEnd type="triangle" w="med" len="med"/>
           </a:ln>
           <a:effectLst/>
         </p:spPr>
         <p:style>
-          <a:lnRef idx="1">
+          <a:lnRef idx="2">
             <a:schemeClr val="accent1"/>
           </a:lnRef>
-          <a:fillRef idx="3">
+          <a:fillRef idx="0">
             <a:schemeClr val="accent1"/>
           </a:fillRef>
-          <a:effectRef idx="2">
+          <a:effectRef idx="1">
             <a:schemeClr val="accent1"/>
           </a:effectRef>
           <a:fontRef idx="minor">
-            <a:schemeClr val="lt1"/>
+            <a:schemeClr val="tx1"/>
           </a:fontRef>
         </p:style>
-        <p:txBody>
-          <a:bodyPr rtlCol="0" anchor="ctr"/>
-          <a:lstStyle/>
-          <a:p>
-            <a:pPr algn="ctr"/>
-          </a:p>
-        </p:txBody>
-      </p:sp>
-      <p:pic>
-        <p:nvPicPr>
-          <p:cNvPr id="45" name="Picture 44" descr="users_w.png"/>
-          <p:cNvPicPr>
-            <a:picLocks noChangeAspect="1"/>
-          </p:cNvPicPr>
-          <p:nvPr/>
-        </p:nvPicPr>
-        <p:blipFill>
-          <a:blip r:embed="rId7"/>
-          <a:stretch>
-            <a:fillRect/>
-          </a:stretch>
-        </p:blipFill>
-        <p:spPr>
-          <a:xfrm>
-            <a:off x="13382244" y="6167628"/>
-            <a:ext cx="301752" cy="301752"/>
-          </a:xfrm>
-          <a:prstGeom prst="rect">
-            <a:avLst/>
-          </a:prstGeom>
-        </p:spPr>
-      </p:pic>
-      <p:sp>
-        <p:nvSpPr>
-          <p:cNvPr id="46" name="TextBox 45"/>
-          <p:cNvSpPr txBox="1"/>
-          <p:nvPr/>
-        </p:nvSpPr>
-        <p:spPr>
-          <a:xfrm>
-            <a:off x="13944600" y="6089904"/>
-            <a:ext cx="2944368" cy="457200"/>
-          </a:xfrm>
-          <a:prstGeom prst="rect">
-            <a:avLst/>
-          </a:prstGeom>
-          <a:noFill/>
-        </p:spPr>
-        <p:txBody>
-          <a:bodyPr wrap="square" lIns="45720" tIns="27432" rIns="45720" bIns="27432" anchor="t">
-            <a:spAutoFit/>
-          </a:bodyPr>
-          <a:lstStyle/>
-          <a:p>
-            <a:pPr algn="l"/>
-            <a:r>
-              <a:rPr sz="1350">
-                <a:solidFill>
-                  <a:srgbClr val="262626"/>
-                </a:solidFill>
-                <a:latin typeface="+mj-lt"/>
-              </a:rPr>
-              <a:t>A person decides</a:t>
-            </a:r>
-          </a:p>
-        </p:txBody>
-      </p:sp>
-      <p:sp>
-        <p:nvSpPr>
-          <p:cNvPr id="47" name="TextBox 46"/>
-          <p:cNvSpPr txBox="1"/>
-          <p:nvPr/>
-        </p:nvSpPr>
-        <p:spPr>
-          <a:xfrm>
-            <a:off x="13350240" y="6565392"/>
-            <a:ext cx="3493008" cy="731520"/>
-          </a:xfrm>
-          <a:prstGeom prst="rect">
-            <a:avLst/>
-          </a:prstGeom>
-          <a:noFill/>
-        </p:spPr>
-        <p:txBody>
-          <a:bodyPr wrap="square" lIns="45720" tIns="27432" rIns="45720" bIns="27432" anchor="t">
-            <a:spAutoFit/>
-          </a:bodyPr>
-          <a:lstStyle/>
-          <a:p>
-            <a:pPr algn="l"/>
-            <a:r>
-              <a:rPr sz="1150">
-                <a:solidFill>
-                  <a:srgbClr val="262626"/>
-                </a:solidFill>
-              </a:rPr>
-              <a:t>The clinician or programme lead approves, edits or rejects</a:t>
-            </a:r>
-          </a:p>
-        </p:txBody>
-      </p:sp>
-      <p:sp>
-        <p:nvSpPr>
-          <p:cNvPr id="48" name="Rounded Rectangle 47"/>
+      </p:cxnSp>
+      <p:sp>
+        <p:nvSpPr>
+          <p:cNvPr id="35" name="Rounded Rectangle 34"/>
           <p:cNvSpPr/>
           <p:nvPr/>
         </p:nvSpPr>
         <p:spPr>
           <a:xfrm>
-            <a:off x="13075920" y="7534656"/>
-            <a:ext cx="3950208" cy="1417320"/>
+            <a:off x="14081760" y="4507992"/>
+            <a:ext cx="2944368" cy="658368"/>
           </a:xfrm>
           <a:prstGeom prst="roundRect">
             <a:avLst>
-              <a:gd name="adj" fmla="val 18064"/>
+              <a:gd name="adj" fmla="val 13888"/>
             </a:avLst>
           </a:prstGeom>
           <a:solidFill>
-            <a:srgbClr val="FFFFFF"/>
+            <a:srgbClr val="4398F9"/>
           </a:solidFill>
           <a:ln>
             <a:noFill/>
@@ -9636,26 +9213,172 @@
           </a:fontRef>
         </p:style>
         <p:txBody>
-          <a:bodyPr rtlCol="0" anchor="ctr"/>
+          <a:bodyPr rtlCol="0" anchor="ctr" wrap="square" tIns="27432" bIns="27432"/>
           <a:lstStyle/>
           <a:p>
             <a:pPr algn="ctr"/>
-          </a:p>
-        </p:txBody>
-      </p:sp>
-      <p:sp>
-        <p:nvSpPr>
-          <p:cNvPr id="49" name="Oval 48"/>
+            <a:r>
+              <a:rPr sz="1200">
+                <a:solidFill>
+                  <a:srgbClr val="FFFFFF"/>
+                </a:solidFill>
+                <a:latin typeface="+mj-lt"/>
+              </a:rPr>
+              <a:t>Draft action → approval queue</a:t>
+            </a:r>
+          </a:p>
+        </p:txBody>
+      </p:sp>
+      <p:cxnSp>
+        <p:nvCxnSpPr>
+          <p:cNvPr id="36" name="Connector 35"/>
+          <p:cNvCxnSpPr/>
+          <p:nvPr/>
+        </p:nvCxnSpPr>
+        <p:spPr>
+          <a:xfrm>
+            <a:off x="13386816" y="4251960"/>
+            <a:ext cx="649224" cy="585216"/>
+          </a:xfrm>
+          <a:prstGeom prst="line">
+            <a:avLst/>
+          </a:prstGeom>
+          <a:ln w="19050">
+            <a:solidFill>
+              <a:srgbClr val="0766D1"/>
+            </a:solidFill>
+            <a:tailEnd type="triangle" w="med" len="med"/>
+          </a:ln>
+          <a:effectLst/>
+        </p:spPr>
+        <p:style>
+          <a:lnRef idx="2">
+            <a:schemeClr val="accent1"/>
+          </a:lnRef>
+          <a:fillRef idx="0">
+            <a:schemeClr val="accent1"/>
+          </a:fillRef>
+          <a:effectRef idx="1">
+            <a:schemeClr val="accent1"/>
+          </a:effectRef>
+          <a:fontRef idx="minor">
+            <a:schemeClr val="tx1"/>
+          </a:fontRef>
+        </p:style>
+      </p:cxnSp>
+      <p:sp>
+        <p:nvSpPr>
+          <p:cNvPr id="37" name="Rounded Rectangle 36"/>
           <p:cNvSpPr/>
           <p:nvPr/>
         </p:nvSpPr>
         <p:spPr>
           <a:xfrm>
-            <a:off x="13258800" y="7671815"/>
-            <a:ext cx="548640" cy="548640"/>
-          </a:xfrm>
-          <a:prstGeom prst="ellipse">
-            <a:avLst/>
+            <a:off x="14081760" y="5367527"/>
+            <a:ext cx="2944368" cy="658368"/>
+          </a:xfrm>
+          <a:prstGeom prst="roundRect">
+            <a:avLst>
+              <a:gd name="adj" fmla="val 13888"/>
+            </a:avLst>
+          </a:prstGeom>
+          <a:solidFill>
+            <a:srgbClr val="0766D1"/>
+          </a:solidFill>
+          <a:ln>
+            <a:noFill/>
+          </a:ln>
+          <a:effectLst>
+            <a:outerShdw blurRad="203200" dist="38100" dir="5400000" algn="ctr" rotWithShape="0">
+              <a:srgbClr val="000000">
+                <a:alpha val="16000"/>
+              </a:srgbClr>
+            </a:outerShdw>
+          </a:effectLst>
+        </p:spPr>
+        <p:style>
+          <a:lnRef idx="1">
+            <a:schemeClr val="accent1"/>
+          </a:lnRef>
+          <a:fillRef idx="3">
+            <a:schemeClr val="accent1"/>
+          </a:fillRef>
+          <a:effectRef idx="2">
+            <a:schemeClr val="accent1"/>
+          </a:effectRef>
+          <a:fontRef idx="minor">
+            <a:schemeClr val="lt1"/>
+          </a:fontRef>
+        </p:style>
+        <p:txBody>
+          <a:bodyPr rtlCol="0" anchor="ctr" wrap="square" tIns="27432" bIns="27432"/>
+          <a:lstStyle/>
+          <a:p>
+            <a:pPr algn="ctr"/>
+            <a:r>
+              <a:rPr sz="1200">
+                <a:solidFill>
+                  <a:srgbClr val="FFFFFF"/>
+                </a:solidFill>
+                <a:latin typeface="+mj-lt"/>
+              </a:rPr>
+              <a:t>Generate charts</a:t>
+            </a:r>
+          </a:p>
+        </p:txBody>
+      </p:sp>
+      <p:cxnSp>
+        <p:nvCxnSpPr>
+          <p:cNvPr id="38" name="Connector 37"/>
+          <p:cNvCxnSpPr/>
+          <p:nvPr/>
+        </p:nvCxnSpPr>
+        <p:spPr>
+          <a:xfrm>
+            <a:off x="13386816" y="4251960"/>
+            <a:ext cx="649224" cy="1444752"/>
+          </a:xfrm>
+          <a:prstGeom prst="line">
+            <a:avLst/>
+          </a:prstGeom>
+          <a:ln w="19050">
+            <a:solidFill>
+              <a:srgbClr val="0766D1"/>
+            </a:solidFill>
+            <a:tailEnd type="triangle" w="med" len="med"/>
+          </a:ln>
+          <a:effectLst/>
+        </p:spPr>
+        <p:style>
+          <a:lnRef idx="2">
+            <a:schemeClr val="accent1"/>
+          </a:lnRef>
+          <a:fillRef idx="0">
+            <a:schemeClr val="accent1"/>
+          </a:fillRef>
+          <a:effectRef idx="1">
+            <a:schemeClr val="accent1"/>
+          </a:effectRef>
+          <a:fontRef idx="minor">
+            <a:schemeClr val="tx1"/>
+          </a:fontRef>
+        </p:style>
+      </p:cxnSp>
+      <p:sp>
+        <p:nvSpPr>
+          <p:cNvPr id="39" name="Rounded Rectangle 38"/>
+          <p:cNvSpPr/>
+          <p:nvPr/>
+        </p:nvSpPr>
+        <p:spPr>
+          <a:xfrm>
+            <a:off x="14081760" y="6227064"/>
+            <a:ext cx="2944368" cy="658368"/>
+          </a:xfrm>
+          <a:prstGeom prst="roundRect">
+            <a:avLst>
+              <a:gd name="adj" fmla="val 13888"/>
+            </a:avLst>
           </a:prstGeom>
           <a:solidFill>
             <a:srgbClr val="032954"/>
@@ -9663,7 +9386,13 @@
           <a:ln>
             <a:noFill/>
           </a:ln>
-          <a:effectLst/>
+          <a:effectLst>
+            <a:outerShdw blurRad="203200" dist="38100" dir="5400000" algn="ctr" rotWithShape="0">
+              <a:srgbClr val="000000">
+                <a:alpha val="16000"/>
+              </a:srgbClr>
+            </a:outerShdw>
+          </a:effectLst>
         </p:spPr>
         <p:style>
           <a:lnRef idx="1">
@@ -9680,31 +9409,77 @@
           </a:fontRef>
         </p:style>
         <p:txBody>
-          <a:bodyPr rtlCol="0" anchor="ctr"/>
+          <a:bodyPr rtlCol="0" anchor="ctr" wrap="square" tIns="27432" bIns="27432"/>
           <a:lstStyle/>
           <a:p>
             <a:pPr algn="ctr"/>
-          </a:p>
-        </p:txBody>
-      </p:sp>
+            <a:r>
+              <a:rPr sz="1200">
+                <a:solidFill>
+                  <a:srgbClr val="FFFFFF"/>
+                </a:solidFill>
+                <a:latin typeface="+mj-lt"/>
+              </a:rPr>
+              <a:t>Query data (SQL)</a:t>
+            </a:r>
+          </a:p>
+        </p:txBody>
+      </p:sp>
+      <p:cxnSp>
+        <p:nvCxnSpPr>
+          <p:cNvPr id="40" name="Connector 39"/>
+          <p:cNvCxnSpPr/>
+          <p:nvPr/>
+        </p:nvCxnSpPr>
+        <p:spPr>
+          <a:xfrm>
+            <a:off x="13386816" y="4251960"/>
+            <a:ext cx="649224" cy="2304288"/>
+          </a:xfrm>
+          <a:prstGeom prst="line">
+            <a:avLst/>
+          </a:prstGeom>
+          <a:ln w="19050">
+            <a:solidFill>
+              <a:srgbClr val="0766D1"/>
+            </a:solidFill>
+            <a:tailEnd type="triangle" w="med" len="med"/>
+          </a:ln>
+          <a:effectLst/>
+        </p:spPr>
+        <p:style>
+          <a:lnRef idx="2">
+            <a:schemeClr val="accent1"/>
+          </a:lnRef>
+          <a:fillRef idx="0">
+            <a:schemeClr val="accent1"/>
+          </a:fillRef>
+          <a:effectRef idx="1">
+            <a:schemeClr val="accent1"/>
+          </a:effectRef>
+          <a:fontRef idx="minor">
+            <a:schemeClr val="tx1"/>
+          </a:fontRef>
+        </p:style>
+      </p:cxnSp>
       <p:pic>
         <p:nvPicPr>
-          <p:cNvPr id="50" name="Picture 49" descr="log_w.png"/>
+          <p:cNvPr id="41" name="Picture 40" descr="table_b.png"/>
           <p:cNvPicPr>
             <a:picLocks noChangeAspect="1"/>
           </p:cNvPicPr>
           <p:nvPr/>
         </p:nvPicPr>
         <p:blipFill>
-          <a:blip r:embed="rId8"/>
+          <a:blip r:embed="rId3"/>
           <a:stretch>
             <a:fillRect/>
           </a:stretch>
         </p:blipFill>
         <p:spPr>
           <a:xfrm>
-            <a:off x="13382244" y="7795260"/>
-            <a:ext cx="301752" cy="301752"/>
+            <a:off x="6720840" y="7470648"/>
+            <a:ext cx="457200" cy="457200"/>
           </a:xfrm>
           <a:prstGeom prst="rect">
             <a:avLst/>
@@ -9713,14 +9488,14 @@
       </p:pic>
       <p:sp>
         <p:nvSpPr>
-          <p:cNvPr id="51" name="TextBox 50"/>
+          <p:cNvPr id="42" name="TextBox 41"/>
           <p:cNvSpPr txBox="1"/>
           <p:nvPr/>
         </p:nvSpPr>
         <p:spPr>
           <a:xfrm>
-            <a:off x="13944600" y="7717536"/>
-            <a:ext cx="2944368" cy="457200"/>
+            <a:off x="7269480" y="7452360"/>
+            <a:ext cx="3291840" cy="457200"/>
           </a:xfrm>
           <a:prstGeom prst="rect">
             <a:avLst/>
@@ -9728,34 +9503,134 @@
           <a:noFill/>
         </p:spPr>
         <p:txBody>
-          <a:bodyPr wrap="square" lIns="45720" tIns="27432" rIns="45720" bIns="27432" anchor="t">
+          <a:bodyPr wrap="square" lIns="45720" tIns="27432" rIns="45720" bIns="27432" anchor="ctr">
             <a:spAutoFit/>
           </a:bodyPr>
           <a:lstStyle/>
           <a:p>
             <a:pPr algn="l"/>
             <a:r>
-              <a:rPr sz="1350">
-                <a:solidFill>
-                  <a:srgbClr val="262626"/>
+              <a:rPr sz="1600">
+                <a:solidFill>
+                  <a:srgbClr val="0766D1"/>
                 </a:solidFill>
                 <a:latin typeface="+mj-lt"/>
               </a:rPr>
-              <a:t>An audit trail</a:t>
-            </a:r>
-          </a:p>
-        </p:txBody>
-      </p:sp>
-      <p:sp>
-        <p:nvSpPr>
-          <p:cNvPr id="52" name="TextBox 51"/>
+              <a:t>CAS table (SAS Viya)</a:t>
+            </a:r>
+          </a:p>
+        </p:txBody>
+      </p:sp>
+      <p:cxnSp>
+        <p:nvCxnSpPr>
+          <p:cNvPr id="43" name="Connector 42"/>
+          <p:cNvCxnSpPr/>
+          <p:nvPr/>
+        </p:nvCxnSpPr>
+        <p:spPr>
+          <a:xfrm>
+            <a:off x="5184648" y="6995160"/>
+            <a:ext cx="1490472" cy="685800"/>
+          </a:xfrm>
+          <a:prstGeom prst="line">
+            <a:avLst/>
+          </a:prstGeom>
+          <a:ln w="19050">
+            <a:solidFill>
+              <a:srgbClr val="0766D1"/>
+            </a:solidFill>
+            <a:prstDash val="sysDot"/>
+            <a:tailEnd type="triangle" w="med" len="med"/>
+          </a:ln>
+          <a:effectLst/>
+        </p:spPr>
+        <p:style>
+          <a:lnRef idx="2">
+            <a:schemeClr val="accent1"/>
+          </a:lnRef>
+          <a:fillRef idx="0">
+            <a:schemeClr val="accent1"/>
+          </a:fillRef>
+          <a:effectRef idx="1">
+            <a:schemeClr val="accent1"/>
+          </a:effectRef>
+          <a:fontRef idx="minor">
+            <a:schemeClr val="tx1"/>
+          </a:fontRef>
+        </p:style>
+      </p:cxnSp>
+      <p:cxnSp>
+        <p:nvCxnSpPr>
+          <p:cNvPr id="44" name="Connector 43"/>
+          <p:cNvCxnSpPr/>
+          <p:nvPr/>
+        </p:nvCxnSpPr>
+        <p:spPr>
+          <a:xfrm flipV="1">
+            <a:off x="9966960" y="6903719"/>
+            <a:ext cx="5586984" cy="777241"/>
+          </a:xfrm>
+          <a:prstGeom prst="line">
+            <a:avLst/>
+          </a:prstGeom>
+          <a:ln w="19050">
+            <a:solidFill>
+              <a:srgbClr val="0766D1"/>
+            </a:solidFill>
+            <a:prstDash val="sysDot"/>
+            <a:tailEnd type="triangle" w="med" len="med"/>
+          </a:ln>
+          <a:effectLst/>
+        </p:spPr>
+        <p:style>
+          <a:lnRef idx="2">
+            <a:schemeClr val="accent1"/>
+          </a:lnRef>
+          <a:fillRef idx="0">
+            <a:schemeClr val="accent1"/>
+          </a:fillRef>
+          <a:effectRef idx="1">
+            <a:schemeClr val="accent1"/>
+          </a:effectRef>
+          <a:fontRef idx="minor">
+            <a:schemeClr val="tx1"/>
+          </a:fontRef>
+        </p:style>
+      </p:cxnSp>
+      <p:pic>
+        <p:nvPicPr>
+          <p:cNvPr id="45" name="Picture 44" descr="check_b.png"/>
+          <p:cNvPicPr>
+            <a:picLocks noChangeAspect="1"/>
+          </p:cNvPicPr>
+          <p:nvPr/>
+        </p:nvPicPr>
+        <p:blipFill>
+          <a:blip r:embed="rId4"/>
+          <a:stretch>
+            <a:fillRect/>
+          </a:stretch>
+        </p:blipFill>
+        <p:spPr>
+          <a:xfrm>
+            <a:off x="1252728" y="8385048"/>
+            <a:ext cx="365760" cy="365760"/>
+          </a:xfrm>
+          <a:prstGeom prst="rect">
+            <a:avLst/>
+          </a:prstGeom>
+        </p:spPr>
+      </p:pic>
+      <p:sp>
+        <p:nvSpPr>
+          <p:cNvPr id="46" name="TextBox 45"/>
           <p:cNvSpPr txBox="1"/>
           <p:nvPr/>
         </p:nvSpPr>
         <p:spPr>
           <a:xfrm>
-            <a:off x="13350240" y="8193024"/>
-            <a:ext cx="3493008" cy="731520"/>
+            <a:off x="1755648" y="8275320"/>
+            <a:ext cx="4511040" cy="685800"/>
           </a:xfrm>
           <a:prstGeom prst="rect">
             <a:avLst/>
@@ -9763,19 +9638,135 @@
           <a:noFill/>
         </p:spPr>
         <p:txBody>
-          <a:bodyPr wrap="square" lIns="45720" tIns="27432" rIns="45720" bIns="27432" anchor="t">
+          <a:bodyPr wrap="square" lIns="45720" tIns="27432" rIns="45720" bIns="27432" anchor="ctr">
             <a:spAutoFit/>
           </a:bodyPr>
           <a:lstStyle/>
           <a:p>
             <a:pPr algn="l"/>
             <a:r>
-              <a:rPr sz="1150">
+              <a:rPr sz="1300">
                 <a:solidFill>
                   <a:srgbClr val="262626"/>
                 </a:solidFill>
               </a:rPr>
-              <a:t>Every specialist call, query and retrieval, next to the answer</a:t>
+              <a:t>Ask in plain language; get governed numbers, cohorts and charts</a:t>
+            </a:r>
+          </a:p>
+        </p:txBody>
+      </p:sp>
+      <p:pic>
+        <p:nvPicPr>
+          <p:cNvPr id="47" name="Picture 46" descr="check_b.png"/>
+          <p:cNvPicPr>
+            <a:picLocks noChangeAspect="1"/>
+          </p:cNvPicPr>
+          <p:nvPr/>
+        </p:nvPicPr>
+        <p:blipFill>
+          <a:blip r:embed="rId4"/>
+          <a:stretch>
+            <a:fillRect/>
+          </a:stretch>
+        </p:blipFill>
+        <p:spPr>
+          <a:xfrm>
+            <a:off x="6632448" y="8385048"/>
+            <a:ext cx="365760" cy="365760"/>
+          </a:xfrm>
+          <a:prstGeom prst="rect">
+            <a:avLst/>
+          </a:prstGeom>
+        </p:spPr>
+      </p:pic>
+      <p:sp>
+        <p:nvSpPr>
+          <p:cNvPr id="48" name="TextBox 47"/>
+          <p:cNvSpPr txBox="1"/>
+          <p:nvPr/>
+        </p:nvSpPr>
+        <p:spPr>
+          <a:xfrm>
+            <a:off x="7135368" y="8275320"/>
+            <a:ext cx="4511040" cy="685800"/>
+          </a:xfrm>
+          <a:prstGeom prst="rect">
+            <a:avLst/>
+          </a:prstGeom>
+          <a:noFill/>
+        </p:spPr>
+        <p:txBody>
+          <a:bodyPr wrap="square" lIns="45720" tIns="27432" rIns="45720" bIns="27432" anchor="ctr">
+            <a:spAutoFit/>
+          </a:bodyPr>
+          <a:lstStyle/>
+          <a:p>
+            <a:pPr algn="l"/>
+            <a:r>
+              <a:rPr sz="1300">
+                <a:solidFill>
+                  <a:srgbClr val="262626"/>
+                </a:solidFill>
+              </a:rPr>
+              <a:t>Risk scoring, programme simulation and demand forecasts on demand</a:t>
+            </a:r>
+          </a:p>
+        </p:txBody>
+      </p:sp>
+      <p:pic>
+        <p:nvPicPr>
+          <p:cNvPr id="49" name="Picture 48" descr="check_b.png"/>
+          <p:cNvPicPr>
+            <a:picLocks noChangeAspect="1"/>
+          </p:cNvPicPr>
+          <p:nvPr/>
+        </p:nvPicPr>
+        <p:blipFill>
+          <a:blip r:embed="rId4"/>
+          <a:stretch>
+            <a:fillRect/>
+          </a:stretch>
+        </p:blipFill>
+        <p:spPr>
+          <a:xfrm>
+            <a:off x="12012168" y="8385048"/>
+            <a:ext cx="365760" cy="365760"/>
+          </a:xfrm>
+          <a:prstGeom prst="rect">
+            <a:avLst/>
+          </a:prstGeom>
+        </p:spPr>
+      </p:pic>
+      <p:sp>
+        <p:nvSpPr>
+          <p:cNvPr id="50" name="TextBox 49"/>
+          <p:cNvSpPr txBox="1"/>
+          <p:nvPr/>
+        </p:nvSpPr>
+        <p:spPr>
+          <a:xfrm>
+            <a:off x="12515088" y="8275320"/>
+            <a:ext cx="4511040" cy="685800"/>
+          </a:xfrm>
+          <a:prstGeom prst="rect">
+            <a:avLst/>
+          </a:prstGeom>
+          <a:noFill/>
+        </p:spPr>
+        <p:txBody>
+          <a:bodyPr wrap="square" lIns="45720" tIns="27432" rIns="45720" bIns="27432" anchor="ctr">
+            <a:spAutoFit/>
+          </a:bodyPr>
+          <a:lstStyle/>
+          <a:p>
+            <a:pPr algn="l"/>
+            <a:r>
+              <a:rPr sz="1300">
+                <a:solidFill>
+                  <a:srgbClr val="262626"/>
+                </a:solidFill>
+              </a:rPr>
+              <a:t>Every answer cites the guideline, shows its tool calls, and ends in a draft a person approves</a:t>
             </a:r>
           </a:p>
         </p:txBody>
@@ -14017,7 +14008,7 @@
           <a:p>
             <a:r>
               <a:rPr sz="3200"/>
-              <a:t>The solution: an early-warning check that scores risk, picks the pathway and points to the nearest door</a:t>
+              <a:t>The solution: a screening agent that scores risk, picks the pathway and points to the nearest door</a:t>
             </a:r>
           </a:p>
         </p:txBody>
@@ -14059,22 +14050,641 @@
       </p:sp>
       <p:sp>
         <p:nvSpPr>
-          <p:cNvPr id="6" name="Rounded Rectangle 5"/>
+          <p:cNvPr id="6" name="TextBox 5"/>
+          <p:cNvSpPr txBox="1"/>
+          <p:nvPr/>
+        </p:nvSpPr>
+        <p:spPr>
+          <a:xfrm>
+            <a:off x="1252728" y="2286000"/>
+            <a:ext cx="3931920" cy="365760"/>
+          </a:xfrm>
+          <a:prstGeom prst="rect">
+            <a:avLst/>
+          </a:prstGeom>
+          <a:noFill/>
+        </p:spPr>
+        <p:txBody>
+          <a:bodyPr wrap="square" lIns="45720" tIns="27432" rIns="45720" bIns="27432" anchor="t">
+            <a:spAutoFit/>
+          </a:bodyPr>
+          <a:lstStyle/>
+          <a:p>
+            <a:pPr algn="ctr"/>
+            <a:r>
+              <a:rPr sz="1600">
+                <a:solidFill>
+                  <a:srgbClr val="0766D1"/>
+                </a:solidFill>
+                <a:latin typeface="+mj-lt"/>
+              </a:rPr>
+              <a:t>Unstructured input</a:t>
+            </a:r>
+          </a:p>
+        </p:txBody>
+      </p:sp>
+      <p:sp>
+        <p:nvSpPr>
+          <p:cNvPr id="7" name="Rounded Rectangle 6"/>
           <p:cNvSpPr/>
           <p:nvPr/>
         </p:nvSpPr>
         <p:spPr>
           <a:xfrm>
-            <a:off x="1252728" y="2331720"/>
-            <a:ext cx="3931920" cy="6492240"/>
+            <a:off x="1252728" y="2651760"/>
+            <a:ext cx="3931920" cy="2971800"/>
           </a:xfrm>
           <a:prstGeom prst="roundRect">
             <a:avLst>
-              <a:gd name="adj" fmla="val 6511"/>
+              <a:gd name="adj" fmla="val 7692"/>
             </a:avLst>
           </a:prstGeom>
+          <a:noFill/>
+          <a:ln w="15875">
+            <a:solidFill>
+              <a:srgbClr val="0766D1"/>
+            </a:solidFill>
+            <a:prstDash val="sysDot"/>
+          </a:ln>
+          <a:effectLst/>
+        </p:spPr>
+        <p:style>
+          <a:lnRef idx="1">
+            <a:schemeClr val="accent1"/>
+          </a:lnRef>
+          <a:fillRef idx="3">
+            <a:schemeClr val="accent1"/>
+          </a:fillRef>
+          <a:effectRef idx="2">
+            <a:schemeClr val="accent1"/>
+          </a:effectRef>
+          <a:fontRef idx="minor">
+            <a:schemeClr val="lt1"/>
+          </a:fontRef>
+        </p:style>
+        <p:txBody>
+          <a:bodyPr rtlCol="0" anchor="ctr"/>
+          <a:lstStyle/>
+          <a:p>
+            <a:pPr algn="ctr"/>
+          </a:p>
+        </p:txBody>
+      </p:sp>
+      <p:sp>
+        <p:nvSpPr>
+          <p:cNvPr id="8" name="Rounded Rectangle 7"/>
+          <p:cNvSpPr/>
+          <p:nvPr/>
+        </p:nvSpPr>
+        <p:spPr>
+          <a:xfrm>
+            <a:off x="1527048" y="2834640"/>
+            <a:ext cx="3383280" cy="640080"/>
+          </a:xfrm>
+          <a:prstGeom prst="roundRect">
+            <a:avLst>
+              <a:gd name="adj" fmla="val 17142"/>
+            </a:avLst>
+          </a:prstGeom>
           <a:solidFill>
-            <a:srgbClr val="FFFFFF"/>
+            <a:srgbClr val="E4E7EA"/>
+          </a:solidFill>
+          <a:ln>
+            <a:noFill/>
+          </a:ln>
+          <a:effectLst/>
+        </p:spPr>
+        <p:style>
+          <a:lnRef idx="1">
+            <a:schemeClr val="accent1"/>
+          </a:lnRef>
+          <a:fillRef idx="3">
+            <a:schemeClr val="accent1"/>
+          </a:fillRef>
+          <a:effectRef idx="2">
+            <a:schemeClr val="accent1"/>
+          </a:effectRef>
+          <a:fontRef idx="minor">
+            <a:schemeClr val="lt1"/>
+          </a:fontRef>
+        </p:style>
+        <p:txBody>
+          <a:bodyPr rtlCol="0" anchor="ctr" wrap="square" lIns="109728" tIns="54864" rIns="109728" bIns="54864"/>
+          <a:lstStyle/>
+          <a:p>
+            <a:pPr algn="ctr"/>
+            <a:r>
+              <a:rPr sz="1300">
+                <a:solidFill>
+                  <a:srgbClr val="262626"/>
+                </a:solidFill>
+                <a:latin typeface="+mj-lt"/>
+              </a:rPr>
+              <a:t>What the person writes in their own words</a:t>
+            </a:r>
+          </a:p>
+        </p:txBody>
+      </p:sp>
+      <p:sp>
+        <p:nvSpPr>
+          <p:cNvPr id="9" name="TextBox 8"/>
+          <p:cNvSpPr txBox="1"/>
+          <p:nvPr/>
+        </p:nvSpPr>
+        <p:spPr>
+          <a:xfrm>
+            <a:off x="1527048" y="3493008"/>
+            <a:ext cx="3383280" cy="457200"/>
+          </a:xfrm>
+          <a:prstGeom prst="rect">
+            <a:avLst/>
+          </a:prstGeom>
+          <a:noFill/>
+        </p:spPr>
+        <p:txBody>
+          <a:bodyPr wrap="square" lIns="45720" tIns="27432" rIns="45720" bIns="27432" anchor="t">
+            <a:spAutoFit/>
+          </a:bodyPr>
+          <a:lstStyle/>
+          <a:p>
+            <a:pPr algn="ctr"/>
+            <a:r>
+              <a:rPr sz="1100">
+                <a:solidFill>
+                  <a:srgbClr val="7E889A"/>
+                </a:solidFill>
+              </a:rPr>
+              <a:t>Symptoms, family history, worries, questions</a:t>
+            </a:r>
+          </a:p>
+        </p:txBody>
+      </p:sp>
+      <p:sp>
+        <p:nvSpPr>
+          <p:cNvPr id="10" name="Down Arrow 9"/>
+          <p:cNvSpPr/>
+          <p:nvPr/>
+        </p:nvSpPr>
+        <p:spPr>
+          <a:xfrm>
+            <a:off x="3063240" y="3968496"/>
+            <a:ext cx="310896" cy="292608"/>
+          </a:xfrm>
+          <a:prstGeom prst="downArrow">
+            <a:avLst/>
+          </a:prstGeom>
+          <a:solidFill>
+            <a:srgbClr val="0766D1"/>
+          </a:solidFill>
+          <a:ln>
+            <a:noFill/>
+          </a:ln>
+          <a:effectLst/>
+        </p:spPr>
+        <p:style>
+          <a:lnRef idx="1">
+            <a:schemeClr val="accent1"/>
+          </a:lnRef>
+          <a:fillRef idx="3">
+            <a:schemeClr val="accent1"/>
+          </a:fillRef>
+          <a:effectRef idx="2">
+            <a:schemeClr val="accent1"/>
+          </a:effectRef>
+          <a:fontRef idx="minor">
+            <a:schemeClr val="lt1"/>
+          </a:fontRef>
+        </p:style>
+        <p:txBody>
+          <a:bodyPr rtlCol="0" anchor="ctr"/>
+          <a:lstStyle/>
+          <a:p>
+            <a:pPr algn="ctr"/>
+          </a:p>
+        </p:txBody>
+      </p:sp>
+      <p:sp>
+        <p:nvSpPr>
+          <p:cNvPr id="11" name="Rounded Rectangle 10"/>
+          <p:cNvSpPr/>
+          <p:nvPr/>
+        </p:nvSpPr>
+        <p:spPr>
+          <a:xfrm>
+            <a:off x="1801368" y="4297680"/>
+            <a:ext cx="2834640" cy="475488"/>
+          </a:xfrm>
+          <a:prstGeom prst="roundRect">
+            <a:avLst>
+              <a:gd name="adj" fmla="val 19230"/>
+            </a:avLst>
+          </a:prstGeom>
+          <a:solidFill>
+            <a:srgbClr val="C4DEFD"/>
+          </a:solidFill>
+          <a:ln>
+            <a:noFill/>
+          </a:ln>
+          <a:effectLst/>
+        </p:spPr>
+        <p:style>
+          <a:lnRef idx="1">
+            <a:schemeClr val="accent1"/>
+          </a:lnRef>
+          <a:fillRef idx="3">
+            <a:schemeClr val="accent1"/>
+          </a:fillRef>
+          <a:effectRef idx="2">
+            <a:schemeClr val="accent1"/>
+          </a:effectRef>
+          <a:fontRef idx="minor">
+            <a:schemeClr val="lt1"/>
+          </a:fontRef>
+        </p:style>
+        <p:txBody>
+          <a:bodyPr rtlCol="0" anchor="ctr" wrap="square" lIns="109728" tIns="54864" rIns="109728" bIns="54864"/>
+          <a:lstStyle/>
+          <a:p>
+            <a:pPr algn="ctr"/>
+            <a:r>
+              <a:rPr sz="1300">
+                <a:solidFill>
+                  <a:srgbClr val="032954"/>
+                </a:solidFill>
+                <a:latin typeface="+mj-lt"/>
+              </a:rPr>
+              <a:t>Language model reads it</a:t>
+            </a:r>
+          </a:p>
+        </p:txBody>
+      </p:sp>
+      <p:sp>
+        <p:nvSpPr>
+          <p:cNvPr id="12" name="Down Arrow 11"/>
+          <p:cNvSpPr/>
+          <p:nvPr/>
+        </p:nvSpPr>
+        <p:spPr>
+          <a:xfrm>
+            <a:off x="3063240" y="4809744"/>
+            <a:ext cx="310896" cy="274320"/>
+          </a:xfrm>
+          <a:prstGeom prst="downArrow">
+            <a:avLst/>
+          </a:prstGeom>
+          <a:solidFill>
+            <a:srgbClr val="0766D1"/>
+          </a:solidFill>
+          <a:ln>
+            <a:noFill/>
+          </a:ln>
+          <a:effectLst/>
+        </p:spPr>
+        <p:style>
+          <a:lnRef idx="1">
+            <a:schemeClr val="accent1"/>
+          </a:lnRef>
+          <a:fillRef idx="3">
+            <a:schemeClr val="accent1"/>
+          </a:fillRef>
+          <a:effectRef idx="2">
+            <a:schemeClr val="accent1"/>
+          </a:effectRef>
+          <a:fontRef idx="minor">
+            <a:schemeClr val="lt1"/>
+          </a:fontRef>
+        </p:style>
+        <p:txBody>
+          <a:bodyPr rtlCol="0" anchor="ctr"/>
+          <a:lstStyle/>
+          <a:p>
+            <a:pPr algn="ctr"/>
+          </a:p>
+        </p:txBody>
+      </p:sp>
+      <p:sp>
+        <p:nvSpPr>
+          <p:cNvPr id="13" name="Rounded Rectangle 12"/>
+          <p:cNvSpPr/>
+          <p:nvPr/>
+        </p:nvSpPr>
+        <p:spPr>
+          <a:xfrm>
+            <a:off x="1527048" y="5102352"/>
+            <a:ext cx="3383280" cy="457200"/>
+          </a:xfrm>
+          <a:prstGeom prst="roundRect">
+            <a:avLst>
+              <a:gd name="adj" fmla="val 20000"/>
+            </a:avLst>
+          </a:prstGeom>
+          <a:solidFill>
+            <a:srgbClr val="0766D1"/>
+          </a:solidFill>
+          <a:ln>
+            <a:noFill/>
+          </a:ln>
+          <a:effectLst/>
+        </p:spPr>
+        <p:style>
+          <a:lnRef idx="1">
+            <a:schemeClr val="accent1"/>
+          </a:lnRef>
+          <a:fillRef idx="3">
+            <a:schemeClr val="accent1"/>
+          </a:fillRef>
+          <a:effectRef idx="2">
+            <a:schemeClr val="accent1"/>
+          </a:effectRef>
+          <a:fontRef idx="minor">
+            <a:schemeClr val="lt1"/>
+          </a:fontRef>
+        </p:style>
+        <p:txBody>
+          <a:bodyPr rtlCol="0" anchor="ctr" wrap="square" lIns="109728" tIns="54864" rIns="109728" bIns="54864"/>
+          <a:lstStyle/>
+          <a:p>
+            <a:pPr algn="ctr"/>
+            <a:r>
+              <a:rPr sz="1300">
+                <a:solidFill>
+                  <a:srgbClr val="FFFFFF"/>
+                </a:solidFill>
+                <a:latin typeface="+mj-lt"/>
+              </a:rPr>
+              <a:t>Flags to tick, questions answered</a:t>
+            </a:r>
+          </a:p>
+        </p:txBody>
+      </p:sp>
+      <p:sp>
+        <p:nvSpPr>
+          <p:cNvPr id="14" name="TextBox 13"/>
+          <p:cNvSpPr txBox="1"/>
+          <p:nvPr/>
+        </p:nvSpPr>
+        <p:spPr>
+          <a:xfrm>
+            <a:off x="1252728" y="5806440"/>
+            <a:ext cx="3931920" cy="365760"/>
+          </a:xfrm>
+          <a:prstGeom prst="rect">
+            <a:avLst/>
+          </a:prstGeom>
+          <a:noFill/>
+        </p:spPr>
+        <p:txBody>
+          <a:bodyPr wrap="square" lIns="45720" tIns="27432" rIns="45720" bIns="27432" anchor="t">
+            <a:spAutoFit/>
+          </a:bodyPr>
+          <a:lstStyle/>
+          <a:p>
+            <a:pPr algn="ctr"/>
+            <a:r>
+              <a:rPr sz="1600">
+                <a:solidFill>
+                  <a:srgbClr val="0766D1"/>
+                </a:solidFill>
+                <a:latin typeface="+mj-lt"/>
+              </a:rPr>
+              <a:t>Structured input</a:t>
+            </a:r>
+          </a:p>
+        </p:txBody>
+      </p:sp>
+      <p:sp>
+        <p:nvSpPr>
+          <p:cNvPr id="15" name="Rounded Rectangle 14"/>
+          <p:cNvSpPr/>
+          <p:nvPr/>
+        </p:nvSpPr>
+        <p:spPr>
+          <a:xfrm>
+            <a:off x="1252728" y="6172200"/>
+            <a:ext cx="3931920" cy="1783080"/>
+          </a:xfrm>
+          <a:prstGeom prst="roundRect">
+            <a:avLst>
+              <a:gd name="adj" fmla="val 12820"/>
+            </a:avLst>
+          </a:prstGeom>
+          <a:noFill/>
+          <a:ln w="15875">
+            <a:solidFill>
+              <a:srgbClr val="0766D1"/>
+            </a:solidFill>
+            <a:prstDash val="sysDot"/>
+          </a:ln>
+          <a:effectLst/>
+        </p:spPr>
+        <p:style>
+          <a:lnRef idx="1">
+            <a:schemeClr val="accent1"/>
+          </a:lnRef>
+          <a:fillRef idx="3">
+            <a:schemeClr val="accent1"/>
+          </a:fillRef>
+          <a:effectRef idx="2">
+            <a:schemeClr val="accent1"/>
+          </a:effectRef>
+          <a:fontRef idx="minor">
+            <a:schemeClr val="lt1"/>
+          </a:fontRef>
+        </p:style>
+        <p:txBody>
+          <a:bodyPr rtlCol="0" anchor="ctr"/>
+          <a:lstStyle/>
+          <a:p>
+            <a:pPr algn="ctr"/>
+          </a:p>
+        </p:txBody>
+      </p:sp>
+      <p:sp>
+        <p:nvSpPr>
+          <p:cNvPr id="16" name="Rounded Rectangle 15"/>
+          <p:cNvSpPr/>
+          <p:nvPr/>
+        </p:nvSpPr>
+        <p:spPr>
+          <a:xfrm>
+            <a:off x="1527048" y="6355080"/>
+            <a:ext cx="3383280" cy="640080"/>
+          </a:xfrm>
+          <a:prstGeom prst="roundRect">
+            <a:avLst>
+              <a:gd name="adj" fmla="val 17142"/>
+            </a:avLst>
+          </a:prstGeom>
+          <a:solidFill>
+            <a:srgbClr val="E4E7EA"/>
+          </a:solidFill>
+          <a:ln>
+            <a:noFill/>
+          </a:ln>
+          <a:effectLst/>
+        </p:spPr>
+        <p:style>
+          <a:lnRef idx="1">
+            <a:schemeClr val="accent1"/>
+          </a:lnRef>
+          <a:fillRef idx="3">
+            <a:schemeClr val="accent1"/>
+          </a:fillRef>
+          <a:effectRef idx="2">
+            <a:schemeClr val="accent1"/>
+          </a:effectRef>
+          <a:fontRef idx="minor">
+            <a:schemeClr val="lt1"/>
+          </a:fontRef>
+        </p:style>
+        <p:txBody>
+          <a:bodyPr rtlCol="0" anchor="ctr" wrap="square" lIns="109728" tIns="54864" rIns="109728" bIns="54864"/>
+          <a:lstStyle/>
+          <a:p>
+            <a:pPr algn="ctr"/>
+            <a:r>
+              <a:rPr sz="1300">
+                <a:solidFill>
+                  <a:srgbClr val="262626"/>
+                </a:solidFill>
+                <a:latin typeface="+mj-lt"/>
+              </a:rPr>
+              <a:t>The screening form</a:t>
+            </a:r>
+          </a:p>
+        </p:txBody>
+      </p:sp>
+      <p:sp>
+        <p:nvSpPr>
+          <p:cNvPr id="17" name="TextBox 16"/>
+          <p:cNvSpPr txBox="1"/>
+          <p:nvPr/>
+        </p:nvSpPr>
+        <p:spPr>
+          <a:xfrm>
+            <a:off x="1527048" y="7040880"/>
+            <a:ext cx="3383280" cy="685800"/>
+          </a:xfrm>
+          <a:prstGeom prst="rect">
+            <a:avLst/>
+          </a:prstGeom>
+          <a:noFill/>
+        </p:spPr>
+        <p:txBody>
+          <a:bodyPr wrap="square" lIns="45720" tIns="27432" rIns="45720" bIns="27432" anchor="t">
+            <a:spAutoFit/>
+          </a:bodyPr>
+          <a:lstStyle/>
+          <a:p>
+            <a:pPr algn="ctr"/>
+            <a:r>
+              <a:rPr sz="1100">
+                <a:solidFill>
+                  <a:srgbClr val="7E889A"/>
+                </a:solidFill>
+              </a:rPr>
+              <a:t>Age, sex, BMI, smoking, family history, own history, symptoms, last test, location</a:t>
+            </a:r>
+          </a:p>
+        </p:txBody>
+      </p:sp>
+      <p:sp>
+        <p:nvSpPr>
+          <p:cNvPr id="18" name="TextBox 17"/>
+          <p:cNvSpPr txBox="1"/>
+          <p:nvPr/>
+        </p:nvSpPr>
+        <p:spPr>
+          <a:xfrm>
+            <a:off x="5184648" y="3749039"/>
+            <a:ext cx="1216152" cy="365760"/>
+          </a:xfrm>
+          <a:prstGeom prst="rect">
+            <a:avLst/>
+          </a:prstGeom>
+          <a:noFill/>
+        </p:spPr>
+        <p:txBody>
+          <a:bodyPr wrap="square" lIns="45720" tIns="27432" rIns="45720" bIns="27432" anchor="t">
+            <a:spAutoFit/>
+          </a:bodyPr>
+          <a:lstStyle/>
+          <a:p>
+            <a:pPr algn="ctr"/>
+            <a:r>
+              <a:rPr sz="1200">
+                <a:solidFill>
+                  <a:srgbClr val="0766D1"/>
+                </a:solidFill>
+                <a:latin typeface="+mj-lt"/>
+              </a:rPr>
+              <a:t>Free text in</a:t>
+            </a:r>
+          </a:p>
+        </p:txBody>
+      </p:sp>
+      <p:sp>
+        <p:nvSpPr>
+          <p:cNvPr id="19" name="Right Arrow 18"/>
+          <p:cNvSpPr/>
+          <p:nvPr/>
+        </p:nvSpPr>
+        <p:spPr>
+          <a:xfrm>
+            <a:off x="5257800" y="4114800"/>
+            <a:ext cx="1069848" cy="329184"/>
+          </a:xfrm>
+          <a:prstGeom prst="rightArrow">
+            <a:avLst/>
+          </a:prstGeom>
+          <a:solidFill>
+            <a:srgbClr val="0766D1"/>
+          </a:solidFill>
+          <a:ln>
+            <a:noFill/>
+          </a:ln>
+          <a:effectLst/>
+        </p:spPr>
+        <p:style>
+          <a:lnRef idx="1">
+            <a:schemeClr val="accent1"/>
+          </a:lnRef>
+          <a:fillRef idx="3">
+            <a:schemeClr val="accent1"/>
+          </a:fillRef>
+          <a:effectRef idx="2">
+            <a:schemeClr val="accent1"/>
+          </a:effectRef>
+          <a:fontRef idx="minor">
+            <a:schemeClr val="lt1"/>
+          </a:fontRef>
+        </p:style>
+        <p:txBody>
+          <a:bodyPr rtlCol="0" anchor="ctr"/>
+          <a:lstStyle/>
+          <a:p>
+            <a:pPr algn="ctr"/>
+          </a:p>
+        </p:txBody>
+      </p:sp>
+      <p:sp>
+        <p:nvSpPr>
+          <p:cNvPr id="20" name="Rounded Rectangle 19"/>
+          <p:cNvSpPr/>
+          <p:nvPr/>
+        </p:nvSpPr>
+        <p:spPr>
+          <a:xfrm>
+            <a:off x="6400800" y="2423160"/>
+            <a:ext cx="4023360" cy="4892040"/>
+          </a:xfrm>
+          <a:prstGeom prst="roundRect">
+            <a:avLst>
+              <a:gd name="adj" fmla="val 6363"/>
+            </a:avLst>
+          </a:prstGeom>
+          <a:solidFill>
+            <a:srgbClr val="0766D1"/>
           </a:solidFill>
           <a:ln>
             <a:noFill/>
@@ -14111,14 +14721,14 @@
       </p:sp>
       <p:sp>
         <p:nvSpPr>
-          <p:cNvPr id="7" name="TextBox 6"/>
+          <p:cNvPr id="21" name="TextBox 20"/>
           <p:cNvSpPr txBox="1"/>
           <p:nvPr/>
         </p:nvSpPr>
         <p:spPr>
           <a:xfrm>
-            <a:off x="1572768" y="2606040"/>
-            <a:ext cx="3291840" cy="274320"/>
+            <a:off x="6675120" y="2651760"/>
+            <a:ext cx="3474720" cy="502920"/>
           </a:xfrm>
           <a:prstGeom prst="rect">
             <a:avLst/>
@@ -14131,29 +14741,73 @@
           </a:bodyPr>
           <a:lstStyle/>
           <a:p>
-            <a:pPr algn="l"/>
-            <a:r>
-              <a:rPr sz="1050">
-                <a:solidFill>
-                  <a:srgbClr val="0766D1"/>
+            <a:pPr algn="ctr"/>
+            <a:r>
+              <a:rPr sz="2000">
+                <a:solidFill>
+                  <a:srgbClr val="FFFFFF"/>
                 </a:solidFill>
                 <a:latin typeface="+mj-lt"/>
               </a:rPr>
-              <a:t>WHAT THE PERSON ENTERS</a:t>
-            </a:r>
-          </a:p>
-        </p:txBody>
-      </p:sp>
-      <p:sp>
-        <p:nvSpPr>
-          <p:cNvPr id="8" name="TextBox 7"/>
+              <a:t>Screening Agent</a:t>
+            </a:r>
+          </a:p>
+        </p:txBody>
+      </p:sp>
+      <p:sp>
+        <p:nvSpPr>
+          <p:cNvPr id="22" name="Rectangle 21"/>
+          <p:cNvSpPr/>
+          <p:nvPr/>
+        </p:nvSpPr>
+        <p:spPr>
+          <a:xfrm>
+            <a:off x="7223760" y="3200400"/>
+            <a:ext cx="2377440" cy="27432"/>
+          </a:xfrm>
+          <a:prstGeom prst="rect">
+            <a:avLst/>
+          </a:prstGeom>
+          <a:solidFill>
+            <a:srgbClr val="FFFFFF"/>
+          </a:solidFill>
+          <a:ln>
+            <a:noFill/>
+          </a:ln>
+          <a:effectLst/>
+        </p:spPr>
+        <p:style>
+          <a:lnRef idx="1">
+            <a:schemeClr val="accent1"/>
+          </a:lnRef>
+          <a:fillRef idx="3">
+            <a:schemeClr val="accent1"/>
+          </a:fillRef>
+          <a:effectRef idx="2">
+            <a:schemeClr val="accent1"/>
+          </a:effectRef>
+          <a:fontRef idx="minor">
+            <a:schemeClr val="lt1"/>
+          </a:fontRef>
+        </p:style>
+        <p:txBody>
+          <a:bodyPr rtlCol="0" anchor="ctr"/>
+          <a:lstStyle/>
+          <a:p>
+            <a:pPr algn="ctr"/>
+          </a:p>
+        </p:txBody>
+      </p:sp>
+      <p:sp>
+        <p:nvSpPr>
+          <p:cNvPr id="23" name="TextBox 22"/>
           <p:cNvSpPr txBox="1"/>
           <p:nvPr/>
         </p:nvSpPr>
         <p:spPr>
           <a:xfrm>
-            <a:off x="1572768" y="2971800"/>
-            <a:ext cx="3337560" cy="5760720"/>
+            <a:off x="6675120" y="3337560"/>
+            <a:ext cx="3474720" cy="1325880"/>
           </a:xfrm>
           <a:prstGeom prst="rect">
             <a:avLst/>
@@ -14166,10 +14820,90 @@
           </a:bodyPr>
           <a:lstStyle/>
           <a:p>
+            <a:pPr algn="ctr"/>
+            <a:r>
+              <a:rPr sz="1400">
+                <a:solidFill>
+                  <a:srgbClr val="FFFFFF"/>
+                </a:solidFill>
+              </a:rPr>
+              <a:t>Scores risk, picks the pathway, finds the nearest door, explains the result and answers questions. English or Arabic.</a:t>
+            </a:r>
+          </a:p>
+        </p:txBody>
+      </p:sp>
+      <p:sp>
+        <p:nvSpPr>
+          <p:cNvPr id="24" name="Rounded Rectangle 23"/>
+          <p:cNvSpPr/>
+          <p:nvPr/>
+        </p:nvSpPr>
+        <p:spPr>
+          <a:xfrm>
+            <a:off x="6675120" y="4800600"/>
+            <a:ext cx="3474720" cy="2286000"/>
+          </a:xfrm>
+          <a:prstGeom prst="roundRect">
+            <a:avLst>
+              <a:gd name="adj" fmla="val 7199"/>
+            </a:avLst>
+          </a:prstGeom>
+          <a:solidFill>
+            <a:srgbClr val="EAF3FE"/>
+          </a:solidFill>
+          <a:ln>
+            <a:noFill/>
+          </a:ln>
+          <a:effectLst/>
+        </p:spPr>
+        <p:style>
+          <a:lnRef idx="1">
+            <a:schemeClr val="accent1"/>
+          </a:lnRef>
+          <a:fillRef idx="3">
+            <a:schemeClr val="accent1"/>
+          </a:fillRef>
+          <a:effectRef idx="2">
+            <a:schemeClr val="accent1"/>
+          </a:effectRef>
+          <a:fontRef idx="minor">
+            <a:schemeClr val="lt1"/>
+          </a:fontRef>
+        </p:style>
+        <p:txBody>
+          <a:bodyPr rtlCol="0" anchor="ctr"/>
+          <a:lstStyle/>
+          <a:p>
+            <a:pPr algn="ctr"/>
+          </a:p>
+        </p:txBody>
+      </p:sp>
+      <p:sp>
+        <p:nvSpPr>
+          <p:cNvPr id="25" name="TextBox 24"/>
+          <p:cNvSpPr txBox="1"/>
+          <p:nvPr/>
+        </p:nvSpPr>
+        <p:spPr>
+          <a:xfrm>
+            <a:off x="6858000" y="4937760"/>
+            <a:ext cx="3108960" cy="2057400"/>
+          </a:xfrm>
+          <a:prstGeom prst="rect">
+            <a:avLst/>
+          </a:prstGeom>
+          <a:noFill/>
+        </p:spPr>
+        <p:txBody>
+          <a:bodyPr wrap="square" lIns="45720" tIns="27432" rIns="45720" bIns="27432" anchor="ctr">
+            <a:spAutoFit/>
+          </a:bodyPr>
+          <a:lstStyle/>
+          <a:p>
             <a:pPr algn="l" marL="237744" indent="-237744">
-              <a:spcAft>
-                <a:spcPts val="600"/>
-              </a:spcAft>
+              <a:spcBef>
+                <a:spcPts val="0"/>
+              </a:spcBef>
               <a:buClr>
                 <a:srgbClr val="0766D1"/>
               </a:buClr>
@@ -14177,19 +14911,19 @@
               <a:buChar char="•"/>
             </a:pPr>
             <a:r>
-              <a:rPr sz="1250">
-                <a:solidFill>
-                  <a:srgbClr val="262626"/>
-                </a:solidFill>
-              </a:rPr>
-              <a:t>Age, sex, height and weight</a:t>
+              <a:rPr sz="1300">
+                <a:solidFill>
+                  <a:srgbClr val="032954"/>
+                </a:solidFill>
+              </a:rPr>
+              <a:t>Rules first: a published score and the national programme decide</a:t>
             </a:r>
           </a:p>
           <a:p>
             <a:pPr algn="l" marL="237744" indent="-237744">
-              <a:spcAft>
-                <a:spcPts val="600"/>
-              </a:spcAft>
+              <a:spcBef>
+                <a:spcPts val="400"/>
+              </a:spcBef>
               <a:buClr>
                 <a:srgbClr val="0766D1"/>
               </a:buClr>
@@ -14197,19 +14931,19 @@
               <a:buChar char="•"/>
             </a:pPr>
             <a:r>
-              <a:rPr sz="1250">
-                <a:solidFill>
-                  <a:srgbClr val="262626"/>
-                </a:solidFill>
-              </a:rPr>
-              <a:t>Smoking and diabetes</a:t>
+              <a:rPr sz="1300">
+                <a:solidFill>
+                  <a:srgbClr val="032954"/>
+                </a:solidFill>
+              </a:rPr>
+              <a:t>Red flags override everything: a doctor within two weeks</a:t>
             </a:r>
           </a:p>
           <a:p>
             <a:pPr algn="l" marL="237744" indent="-237744">
-              <a:spcAft>
-                <a:spcPts val="600"/>
-              </a:spcAft>
+              <a:spcBef>
+                <a:spcPts val="400"/>
+              </a:spcBef>
               <a:buClr>
                 <a:srgbClr val="0766D1"/>
               </a:buClr>
@@ -14217,146 +14951,26 @@
               <a:buChar char="•"/>
             </a:pPr>
             <a:r>
-              <a:rPr sz="1250">
-                <a:solidFill>
-                  <a:srgbClr val="262626"/>
-                </a:solidFill>
-              </a:rPr>
-              <a:t>Bowel cancer in a parent, sibling or child, and at what age</a:t>
-            </a:r>
-          </a:p>
-          <a:p>
-            <a:pPr algn="l" marL="237744" indent="-237744">
-              <a:spcAft>
-                <a:spcPts val="600"/>
-              </a:spcAft>
-              <a:buClr>
-                <a:srgbClr val="0766D1"/>
-              </a:buClr>
-              <a:buFont typeface="Arial"/>
-              <a:buChar char="•"/>
-            </a:pPr>
-            <a:r>
-              <a:rPr sz="1250">
-                <a:solidFill>
-                  <a:srgbClr val="262626"/>
-                </a:solidFill>
-              </a:rPr>
-              <a:t>Own history: polyps, inflammatory bowel disease, an inherited syndrome</a:t>
-            </a:r>
-          </a:p>
-          <a:p>
-            <a:pPr algn="l" marL="237744" indent="-237744">
-              <a:spcAft>
-                <a:spcPts val="600"/>
-              </a:spcAft>
-              <a:buClr>
-                <a:srgbClr val="0766D1"/>
-              </a:buClr>
-              <a:buFont typeface="Arial"/>
-              <a:buChar char="•"/>
-            </a:pPr>
-            <a:r>
-              <a:rPr sz="1250">
-                <a:solidFill>
-                  <a:srgbClr val="262626"/>
-                </a:solidFill>
-              </a:rPr>
-              <a:t>Warning symptoms, and for how long</a:t>
-            </a:r>
-          </a:p>
-          <a:p>
-            <a:pPr algn="l" marL="237744" indent="-237744">
-              <a:spcAft>
-                <a:spcPts val="600"/>
-              </a:spcAft>
-              <a:buClr>
-                <a:srgbClr val="0766D1"/>
-              </a:buClr>
-              <a:buFont typeface="Arial"/>
-              <a:buChar char="•"/>
-            </a:pPr>
-            <a:r>
-              <a:rPr sz="1250">
-                <a:solidFill>
-                  <a:srgbClr val="262626"/>
-                </a:solidFill>
-              </a:rPr>
-              <a:t>Last screening test and when</a:t>
-            </a:r>
-          </a:p>
-          <a:p>
-            <a:pPr algn="l" marL="237744" indent="-237744">
-              <a:spcAft>
-                <a:spcPts val="600"/>
-              </a:spcAft>
-              <a:buClr>
-                <a:srgbClr val="0766D1"/>
-              </a:buClr>
-              <a:buFont typeface="Arial"/>
-              <a:buChar char="•"/>
-            </a:pPr>
-            <a:r>
-              <a:rPr sz="1250">
-                <a:solidFill>
-                  <a:srgbClr val="262626"/>
-                </a:solidFill>
-              </a:rPr>
-              <a:t>Diet, activity, alcohol</a:t>
-            </a:r>
-          </a:p>
-          <a:p>
-            <a:pPr algn="l" marL="237744" indent="-237744">
-              <a:spcAft>
-                <a:spcPts val="600"/>
-              </a:spcAft>
-              <a:buClr>
-                <a:srgbClr val="0766D1"/>
-              </a:buClr>
-              <a:buFont typeface="Arial"/>
-              <a:buChar char="•"/>
-            </a:pPr>
-            <a:r>
-              <a:rPr sz="1250">
-                <a:solidFill>
-                  <a:srgbClr val="262626"/>
-                </a:solidFill>
-              </a:rPr>
-              <a:t>Where they live</a:t>
-            </a:r>
-          </a:p>
-          <a:p>
-            <a:pPr algn="l" marL="237744" indent="-237744">
-              <a:spcAft>
-                <a:spcPts val="600"/>
-              </a:spcAft>
-              <a:buClr>
-                <a:srgbClr val="0766D1"/>
-              </a:buClr>
-              <a:buFont typeface="Arial"/>
-              <a:buChar char="•"/>
-            </a:pPr>
-            <a:r>
-              <a:rPr sz="1250">
-                <a:solidFill>
-                  <a:srgbClr val="262626"/>
-                </a:solidFill>
-              </a:rPr>
-              <a:t>Anything else, in their own words</a:t>
-            </a:r>
-          </a:p>
-        </p:txBody>
-      </p:sp>
-      <p:sp>
-        <p:nvSpPr>
-          <p:cNvPr id="9" name="Right Arrow 8"/>
+              <a:rPr sz="1300">
+                <a:solidFill>
+                  <a:srgbClr val="032954"/>
+                </a:solidFill>
+              </a:rPr>
+              <a:t>Never diagnoses, nothing stored</a:t>
+            </a:r>
+          </a:p>
+        </p:txBody>
+      </p:sp>
+      <p:sp>
+        <p:nvSpPr>
+          <p:cNvPr id="26" name="Right Arrow 25"/>
           <p:cNvSpPr/>
           <p:nvPr/>
         </p:nvSpPr>
         <p:spPr>
           <a:xfrm>
-            <a:off x="5321808" y="5349240"/>
-            <a:ext cx="640080" cy="411480"/>
+            <a:off x="10497312" y="4114800"/>
+            <a:ext cx="676656" cy="329184"/>
           </a:xfrm>
           <a:prstGeom prst="rightArrow">
             <a:avLst/>
@@ -14393,57 +15007,22 @@
       </p:sp>
       <p:sp>
         <p:nvSpPr>
-          <p:cNvPr id="10" name="TextBox 9"/>
-          <p:cNvSpPr txBox="1"/>
-          <p:nvPr/>
-        </p:nvSpPr>
-        <p:spPr>
-          <a:xfrm>
-            <a:off x="5989320" y="2286000"/>
-            <a:ext cx="6583680" cy="274320"/>
-          </a:xfrm>
-          <a:prstGeom prst="rect">
-            <a:avLst/>
-          </a:prstGeom>
-          <a:noFill/>
-        </p:spPr>
-        <p:txBody>
-          <a:bodyPr wrap="square" lIns="45720" tIns="27432" rIns="45720" bIns="27432" anchor="t">
-            <a:spAutoFit/>
-          </a:bodyPr>
-          <a:lstStyle/>
-          <a:p>
-            <a:pPr algn="l"/>
-            <a:r>
-              <a:rPr sz="1050">
-                <a:solidFill>
-                  <a:srgbClr val="0766D1"/>
-                </a:solidFill>
-                <a:latin typeface="+mj-lt"/>
-              </a:rPr>
-              <a:t>THE ENGINE</a:t>
-            </a:r>
-          </a:p>
-        </p:txBody>
-      </p:sp>
-      <p:sp>
-        <p:nvSpPr>
-          <p:cNvPr id="11" name="Rounded Rectangle 10"/>
+          <p:cNvPr id="27" name="Rounded Rectangle 26"/>
           <p:cNvSpPr/>
           <p:nvPr/>
         </p:nvSpPr>
         <p:spPr>
           <a:xfrm>
-            <a:off x="5989320" y="2651760"/>
-            <a:ext cx="6583680" cy="1371600"/>
+            <a:off x="11247120" y="3200400"/>
+            <a:ext cx="2103120" cy="2103120"/>
           </a:xfrm>
           <a:prstGeom prst="roundRect">
             <a:avLst>
-              <a:gd name="adj" fmla="val 18666"/>
+              <a:gd name="adj" fmla="val 13043"/>
             </a:avLst>
           </a:prstGeom>
           <a:solidFill>
-            <a:srgbClr val="FFFFFF"/>
+            <a:srgbClr val="C4DEFD"/>
           </a:solidFill>
           <a:ln>
             <a:noFill/>
@@ -14478,113 +15057,129 @@
           </a:p>
         </p:txBody>
       </p:sp>
-      <p:sp>
-        <p:nvSpPr>
-          <p:cNvPr id="12" name="Rounded Rectangle 11"/>
+      <p:pic>
+        <p:nvPicPr>
+          <p:cNvPr id="28" name="Picture 27" descr="usb_n.png"/>
+          <p:cNvPicPr>
+            <a:picLocks noChangeAspect="1"/>
+          </p:cNvPicPr>
+          <p:nvPr/>
+        </p:nvPicPr>
+        <p:blipFill>
+          <a:blip r:embed="rId2"/>
+          <a:stretch>
+            <a:fillRect/>
+          </a:stretch>
+        </p:blipFill>
+        <p:spPr>
+          <a:xfrm>
+            <a:off x="11932920" y="3474720"/>
+            <a:ext cx="731520" cy="731520"/>
+          </a:xfrm>
+          <a:prstGeom prst="rect">
+            <a:avLst/>
+          </a:prstGeom>
+        </p:spPr>
+      </p:pic>
+      <p:sp>
+        <p:nvSpPr>
+          <p:cNvPr id="29" name="TextBox 28"/>
+          <p:cNvSpPr txBox="1"/>
+          <p:nvPr/>
+        </p:nvSpPr>
+        <p:spPr>
+          <a:xfrm>
+            <a:off x="11247120" y="4297680"/>
+            <a:ext cx="2103120" cy="822960"/>
+          </a:xfrm>
+          <a:prstGeom prst="rect">
+            <a:avLst/>
+          </a:prstGeom>
+          <a:noFill/>
+        </p:spPr>
+        <p:txBody>
+          <a:bodyPr wrap="square" lIns="45720" tIns="27432" rIns="45720" bIns="27432" anchor="t">
+            <a:spAutoFit/>
+          </a:bodyPr>
+          <a:lstStyle/>
+          <a:p>
+            <a:pPr algn="ctr"/>
+            <a:r>
+              <a:rPr sz="1800">
+                <a:solidFill>
+                  <a:srgbClr val="032954"/>
+                </a:solidFill>
+                <a:latin typeface="+mj-lt"/>
+              </a:rPr>
+              <a:t>MCP server</a:t>
+            </a:r>
+          </a:p>
+          <a:p>
+            <a:pPr algn="ctr"/>
+            <a:r>
+              <a:rPr sz="1100">
+                <a:solidFill>
+                  <a:srgbClr val="032954"/>
+                </a:solidFill>
+              </a:rPr>
+              <a:t>one plug, every tool</a:t>
+            </a:r>
+          </a:p>
+        </p:txBody>
+      </p:sp>
+      <p:sp>
+        <p:nvSpPr>
+          <p:cNvPr id="30" name="TextBox 29"/>
+          <p:cNvSpPr txBox="1"/>
+          <p:nvPr/>
+        </p:nvSpPr>
+        <p:spPr>
+          <a:xfrm>
+            <a:off x="14081760" y="2286000"/>
+            <a:ext cx="2944368" cy="365760"/>
+          </a:xfrm>
+          <a:prstGeom prst="rect">
+            <a:avLst/>
+          </a:prstGeom>
+          <a:noFill/>
+        </p:spPr>
+        <p:txBody>
+          <a:bodyPr wrap="square" lIns="45720" tIns="27432" rIns="45720" bIns="27432" anchor="t">
+            <a:spAutoFit/>
+          </a:bodyPr>
+          <a:lstStyle/>
+          <a:p>
+            <a:pPr algn="ctr"/>
+            <a:r>
+              <a:rPr sz="1600">
+                <a:solidFill>
+                  <a:srgbClr val="0766D1"/>
+                </a:solidFill>
+                <a:latin typeface="+mj-lt"/>
+              </a:rPr>
+              <a:t>Tools</a:t>
+            </a:r>
+          </a:p>
+        </p:txBody>
+      </p:sp>
+      <p:sp>
+        <p:nvSpPr>
+          <p:cNvPr id="31" name="Rounded Rectangle 30"/>
           <p:cNvSpPr/>
           <p:nvPr/>
         </p:nvSpPr>
         <p:spPr>
           <a:xfrm>
-            <a:off x="6263640" y="2880360"/>
-            <a:ext cx="2011680" cy="384048"/>
+            <a:off x="14081760" y="2788920"/>
+            <a:ext cx="2944368" cy="658368"/>
           </a:xfrm>
           <a:prstGeom prst="roundRect">
             <a:avLst>
-              <a:gd name="adj" fmla="val 50000"/>
+              <a:gd name="adj" fmla="val 13888"/>
             </a:avLst>
           </a:prstGeom>
           <a:solidFill>
-            <a:srgbClr val="032954"/>
-          </a:solidFill>
-          <a:ln>
-            <a:noFill/>
-          </a:ln>
-          <a:effectLst/>
-        </p:spPr>
-        <p:style>
-          <a:lnRef idx="1">
-            <a:schemeClr val="accent1"/>
-          </a:lnRef>
-          <a:fillRef idx="3">
-            <a:schemeClr val="accent1"/>
-          </a:fillRef>
-          <a:effectRef idx="2">
-            <a:schemeClr val="accent1"/>
-          </a:effectRef>
-          <a:fontRef idx="minor">
-            <a:schemeClr val="lt1"/>
-          </a:fontRef>
-        </p:style>
-        <p:txBody>
-          <a:bodyPr rtlCol="0" anchor="ctr" wrap="square" lIns="73152" tIns="18288" rIns="73152" bIns="18288"/>
-          <a:lstStyle/>
-          <a:p>
-            <a:pPr algn="ctr"/>
-            <a:r>
-              <a:rPr sz="1200">
-                <a:solidFill>
-                  <a:srgbClr val="FFFFFF"/>
-                </a:solidFill>
-                <a:latin typeface="+mj-lt"/>
-              </a:rPr>
-              <a:t>1 · Risk tier</a:t>
-            </a:r>
-          </a:p>
-        </p:txBody>
-      </p:sp>
-      <p:sp>
-        <p:nvSpPr>
-          <p:cNvPr id="13" name="TextBox 12"/>
-          <p:cNvSpPr txBox="1"/>
-          <p:nvPr/>
-        </p:nvSpPr>
-        <p:spPr>
-          <a:xfrm>
-            <a:off x="8458200" y="2761488"/>
-            <a:ext cx="3886200" cy="1188720"/>
-          </a:xfrm>
-          <a:prstGeom prst="rect">
-            <a:avLst/>
-          </a:prstGeom>
-          <a:noFill/>
-        </p:spPr>
-        <p:txBody>
-          <a:bodyPr wrap="square" lIns="45720" tIns="27432" rIns="45720" bIns="27432" anchor="ctr">
-            <a:spAutoFit/>
-          </a:bodyPr>
-          <a:lstStyle/>
-          <a:p>
-            <a:pPr algn="l"/>
-            <a:r>
-              <a:rPr sz="1150">
-                <a:solidFill>
-                  <a:srgbClr val="262626"/>
-                </a:solidFill>
-              </a:rPr>
-              <a:t>The Asia-Pacific Colorectal Screening score (Gut, 2011): age, sex, family history, smoking, BMI. Each tier carries a measured rate of advanced findings at colonoscopy, about 1%, 3% and 5%.</a:t>
-            </a:r>
-          </a:p>
-        </p:txBody>
-      </p:sp>
-      <p:sp>
-        <p:nvSpPr>
-          <p:cNvPr id="14" name="Rounded Rectangle 13"/>
-          <p:cNvSpPr/>
-          <p:nvPr/>
-        </p:nvSpPr>
-        <p:spPr>
-          <a:xfrm>
-            <a:off x="5989320" y="4187952"/>
-            <a:ext cx="6583680" cy="1371600"/>
-          </a:xfrm>
-          <a:prstGeom prst="roundRect">
-            <a:avLst>
-              <a:gd name="adj" fmla="val 18666"/>
-            </a:avLst>
-          </a:prstGeom>
-          <a:solidFill>
-            <a:srgbClr val="FFFFFF"/>
+            <a:srgbClr val="7E889A"/>
           </a:solidFill>
           <a:ln>
             <a:noFill/>
@@ -14612,120 +15207,77 @@
           </a:fontRef>
         </p:style>
         <p:txBody>
-          <a:bodyPr rtlCol="0" anchor="ctr"/>
+          <a:bodyPr rtlCol="0" anchor="ctr" wrap="square" tIns="27432" bIns="27432"/>
           <a:lstStyle/>
           <a:p>
             <a:pPr algn="ctr"/>
-          </a:p>
-        </p:txBody>
-      </p:sp>
-      <p:sp>
-        <p:nvSpPr>
-          <p:cNvPr id="15" name="Rounded Rectangle 14"/>
+            <a:r>
+              <a:rPr sz="1200">
+                <a:solidFill>
+                  <a:srgbClr val="FFFFFF"/>
+                </a:solidFill>
+                <a:latin typeface="+mj-lt"/>
+              </a:rPr>
+              <a:t>Score risk (APCS, Gut 2011)</a:t>
+            </a:r>
+          </a:p>
+        </p:txBody>
+      </p:sp>
+      <p:cxnSp>
+        <p:nvCxnSpPr>
+          <p:cNvPr id="32" name="Connector 31"/>
+          <p:cNvCxnSpPr/>
+          <p:nvPr/>
+        </p:nvCxnSpPr>
+        <p:spPr>
+          <a:xfrm flipV="1">
+            <a:off x="13386816" y="3118103"/>
+            <a:ext cx="649224" cy="1133857"/>
+          </a:xfrm>
+          <a:prstGeom prst="line">
+            <a:avLst/>
+          </a:prstGeom>
+          <a:ln w="19050">
+            <a:solidFill>
+              <a:srgbClr val="0766D1"/>
+            </a:solidFill>
+            <a:tailEnd type="triangle" w="med" len="med"/>
+          </a:ln>
+          <a:effectLst/>
+        </p:spPr>
+        <p:style>
+          <a:lnRef idx="2">
+            <a:schemeClr val="accent1"/>
+          </a:lnRef>
+          <a:fillRef idx="0">
+            <a:schemeClr val="accent1"/>
+          </a:fillRef>
+          <a:effectRef idx="1">
+            <a:schemeClr val="accent1"/>
+          </a:effectRef>
+          <a:fontRef idx="minor">
+            <a:schemeClr val="tx1"/>
+          </a:fontRef>
+        </p:style>
+      </p:cxnSp>
+      <p:sp>
+        <p:nvSpPr>
+          <p:cNvPr id="33" name="Rounded Rectangle 32"/>
           <p:cNvSpPr/>
           <p:nvPr/>
         </p:nvSpPr>
         <p:spPr>
           <a:xfrm>
-            <a:off x="6263640" y="4416552"/>
-            <a:ext cx="2011680" cy="384048"/>
+            <a:off x="14081760" y="3648456"/>
+            <a:ext cx="2944368" cy="658368"/>
           </a:xfrm>
           <a:prstGeom prst="roundRect">
             <a:avLst>
-              <a:gd name="adj" fmla="val 50000"/>
+              <a:gd name="adj" fmla="val 13888"/>
             </a:avLst>
           </a:prstGeom>
           <a:solidFill>
-            <a:srgbClr val="0766D1"/>
-          </a:solidFill>
-          <a:ln>
-            <a:noFill/>
-          </a:ln>
-          <a:effectLst/>
-        </p:spPr>
-        <p:style>
-          <a:lnRef idx="1">
-            <a:schemeClr val="accent1"/>
-          </a:lnRef>
-          <a:fillRef idx="3">
-            <a:schemeClr val="accent1"/>
-          </a:fillRef>
-          <a:effectRef idx="2">
-            <a:schemeClr val="accent1"/>
-          </a:effectRef>
-          <a:fontRef idx="minor">
-            <a:schemeClr val="lt1"/>
-          </a:fontRef>
-        </p:style>
-        <p:txBody>
-          <a:bodyPr rtlCol="0" anchor="ctr" wrap="square" lIns="73152" tIns="18288" rIns="73152" bIns="18288"/>
-          <a:lstStyle/>
-          <a:p>
-            <a:pPr algn="ctr"/>
-            <a:r>
-              <a:rPr sz="1200">
-                <a:solidFill>
-                  <a:srgbClr val="FFFFFF"/>
-                </a:solidFill>
-                <a:latin typeface="+mj-lt"/>
-              </a:rPr>
-              <a:t>2 · Pathway rules</a:t>
-            </a:r>
-          </a:p>
-        </p:txBody>
-      </p:sp>
-      <p:sp>
-        <p:nvSpPr>
-          <p:cNvPr id="16" name="TextBox 15"/>
-          <p:cNvSpPr txBox="1"/>
-          <p:nvPr/>
-        </p:nvSpPr>
-        <p:spPr>
-          <a:xfrm>
-            <a:off x="8458200" y="4297680"/>
-            <a:ext cx="3886200" cy="1188720"/>
-          </a:xfrm>
-          <a:prstGeom prst="rect">
-            <a:avLst/>
-          </a:prstGeom>
-          <a:noFill/>
-        </p:spPr>
-        <p:txBody>
-          <a:bodyPr wrap="square" lIns="45720" tIns="27432" rIns="45720" bIns="27432" anchor="ctr">
-            <a:spAutoFit/>
-          </a:bodyPr>
-          <a:lstStyle/>
-          <a:p>
-            <a:pPr algn="l"/>
-            <a:r>
-              <a:rPr sz="1150">
-                <a:solidFill>
-                  <a:srgbClr val="262626"/>
-                </a:solidFill>
-              </a:rPr>
-              <a:t>The national programme: FIT yearly or colonoscopy ten-yearly from 40 to 75. Colonoscopy five-yearly from ten years before a young relative's diagnosis. Surveillance after polyps, IBD or a syndrome. Any red flag: a doctor within two weeks.</a:t>
-            </a:r>
-          </a:p>
-        </p:txBody>
-      </p:sp>
-      <p:sp>
-        <p:nvSpPr>
-          <p:cNvPr id="17" name="Rounded Rectangle 16"/>
-          <p:cNvSpPr/>
-          <p:nvPr/>
-        </p:nvSpPr>
-        <p:spPr>
-          <a:xfrm>
-            <a:off x="5989320" y="5724144"/>
-            <a:ext cx="6583680" cy="1371600"/>
-          </a:xfrm>
-          <a:prstGeom prst="roundRect">
-            <a:avLst>
-              <a:gd name="adj" fmla="val 18666"/>
-            </a:avLst>
-          </a:prstGeom>
-          <a:solidFill>
-            <a:srgbClr val="FFFFFF"/>
+            <a:srgbClr val="C4DEFD"/>
           </a:solidFill>
           <a:ln>
             <a:noFill/>
@@ -14753,120 +15305,77 @@
           </a:fontRef>
         </p:style>
         <p:txBody>
-          <a:bodyPr rtlCol="0" anchor="ctr"/>
+          <a:bodyPr rtlCol="0" anchor="ctr" wrap="square" tIns="27432" bIns="27432"/>
           <a:lstStyle/>
           <a:p>
             <a:pPr algn="ctr"/>
-          </a:p>
-        </p:txBody>
-      </p:sp>
-      <p:sp>
-        <p:nvSpPr>
-          <p:cNvPr id="18" name="Rounded Rectangle 17"/>
+            <a:r>
+              <a:rPr sz="1200">
+                <a:solidFill>
+                  <a:srgbClr val="032954"/>
+                </a:solidFill>
+                <a:latin typeface="+mj-lt"/>
+              </a:rPr>
+              <a:t>Apply pathway rules (national programme)</a:t>
+            </a:r>
+          </a:p>
+        </p:txBody>
+      </p:sp>
+      <p:cxnSp>
+        <p:nvCxnSpPr>
+          <p:cNvPr id="34" name="Connector 33"/>
+          <p:cNvCxnSpPr/>
+          <p:nvPr/>
+        </p:nvCxnSpPr>
+        <p:spPr>
+          <a:xfrm flipV="1">
+            <a:off x="13386816" y="3977639"/>
+            <a:ext cx="649224" cy="274321"/>
+          </a:xfrm>
+          <a:prstGeom prst="line">
+            <a:avLst/>
+          </a:prstGeom>
+          <a:ln w="19050">
+            <a:solidFill>
+              <a:srgbClr val="0766D1"/>
+            </a:solidFill>
+            <a:tailEnd type="triangle" w="med" len="med"/>
+          </a:ln>
+          <a:effectLst/>
+        </p:spPr>
+        <p:style>
+          <a:lnRef idx="2">
+            <a:schemeClr val="accent1"/>
+          </a:lnRef>
+          <a:fillRef idx="0">
+            <a:schemeClr val="accent1"/>
+          </a:fillRef>
+          <a:effectRef idx="1">
+            <a:schemeClr val="accent1"/>
+          </a:effectRef>
+          <a:fontRef idx="minor">
+            <a:schemeClr val="tx1"/>
+          </a:fontRef>
+        </p:style>
+      </p:cxnSp>
+      <p:sp>
+        <p:nvSpPr>
+          <p:cNvPr id="35" name="Rounded Rectangle 34"/>
           <p:cNvSpPr/>
           <p:nvPr/>
         </p:nvSpPr>
         <p:spPr>
           <a:xfrm>
-            <a:off x="6263640" y="5952744"/>
-            <a:ext cx="2011680" cy="384048"/>
+            <a:off x="14081760" y="4507992"/>
+            <a:ext cx="2944368" cy="658368"/>
           </a:xfrm>
           <a:prstGeom prst="roundRect">
             <a:avLst>
-              <a:gd name="adj" fmla="val 50000"/>
+              <a:gd name="adj" fmla="val 13888"/>
             </a:avLst>
           </a:prstGeom>
           <a:solidFill>
-            <a:srgbClr val="032954"/>
-          </a:solidFill>
-          <a:ln>
-            <a:noFill/>
-          </a:ln>
-          <a:effectLst/>
-        </p:spPr>
-        <p:style>
-          <a:lnRef idx="1">
-            <a:schemeClr val="accent1"/>
-          </a:lnRef>
-          <a:fillRef idx="3">
-            <a:schemeClr val="accent1"/>
-          </a:fillRef>
-          <a:effectRef idx="2">
-            <a:schemeClr val="accent1"/>
-          </a:effectRef>
-          <a:fontRef idx="minor">
-            <a:schemeClr val="lt1"/>
-          </a:fontRef>
-        </p:style>
-        <p:txBody>
-          <a:bodyPr rtlCol="0" anchor="ctr" wrap="square" lIns="73152" tIns="18288" rIns="73152" bIns="18288"/>
-          <a:lstStyle/>
-          <a:p>
-            <a:pPr algn="ctr"/>
-            <a:r>
-              <a:rPr sz="1200">
-                <a:solidFill>
-                  <a:srgbClr val="FFFFFF"/>
-                </a:solidFill>
-                <a:latin typeface="+mj-lt"/>
-              </a:rPr>
-              <a:t>3 · Nearest door</a:t>
-            </a:r>
-          </a:p>
-        </p:txBody>
-      </p:sp>
-      <p:sp>
-        <p:nvSpPr>
-          <p:cNvPr id="19" name="TextBox 18"/>
-          <p:cNvSpPr txBox="1"/>
-          <p:nvPr/>
-        </p:nvSpPr>
-        <p:spPr>
-          <a:xfrm>
-            <a:off x="8458200" y="5833872"/>
-            <a:ext cx="3886200" cy="1188720"/>
-          </a:xfrm>
-          <a:prstGeom prst="rect">
-            <a:avLst/>
-          </a:prstGeom>
-          <a:noFill/>
-        </p:spPr>
-        <p:txBody>
-          <a:bodyPr wrap="square" lIns="45720" tIns="27432" rIns="45720" bIns="27432" anchor="ctr">
-            <a:spAutoFit/>
-          </a:bodyPr>
-          <a:lstStyle/>
-          <a:p>
-            <a:pPr algn="l"/>
-            <a:r>
-              <a:rPr sz="1150">
-                <a:solidFill>
-                  <a:srgbClr val="262626"/>
-                </a:solidFill>
-              </a:rPr>
-              <a:t>Eighteen hospitals and health centres and what each offers: FIT kits and GP review at health centres, endoscopy at hospitals. Distance and travel time from where the person lives, on a map.</a:t>
-            </a:r>
-          </a:p>
-        </p:txBody>
-      </p:sp>
-      <p:sp>
-        <p:nvSpPr>
-          <p:cNvPr id="20" name="Rounded Rectangle 19"/>
-          <p:cNvSpPr/>
-          <p:nvPr/>
-        </p:nvSpPr>
-        <p:spPr>
-          <a:xfrm>
-            <a:off x="5989320" y="7260336"/>
-            <a:ext cx="6583680" cy="1371600"/>
-          </a:xfrm>
-          <a:prstGeom prst="roundRect">
-            <a:avLst>
-              <a:gd name="adj" fmla="val 18666"/>
-            </a:avLst>
-          </a:prstGeom>
-          <a:solidFill>
-            <a:srgbClr val="FFFFFF"/>
+            <a:srgbClr val="4398F9"/>
           </a:solidFill>
           <a:ln>
             <a:noFill/>
@@ -14894,164 +15403,77 @@
           </a:fontRef>
         </p:style>
         <p:txBody>
-          <a:bodyPr rtlCol="0" anchor="ctr"/>
+          <a:bodyPr rtlCol="0" anchor="ctr" wrap="square" tIns="27432" bIns="27432"/>
           <a:lstStyle/>
           <a:p>
             <a:pPr algn="ctr"/>
-          </a:p>
-        </p:txBody>
-      </p:sp>
-      <p:sp>
-        <p:nvSpPr>
-          <p:cNvPr id="21" name="Rounded Rectangle 20"/>
+            <a:r>
+              <a:rPr sz="1200">
+                <a:solidFill>
+                  <a:srgbClr val="FFFFFF"/>
+                </a:solidFill>
+                <a:latin typeface="+mj-lt"/>
+              </a:rPr>
+              <a:t>Find the nearest facility (distance, minutes)</a:t>
+            </a:r>
+          </a:p>
+        </p:txBody>
+      </p:sp>
+      <p:cxnSp>
+        <p:nvCxnSpPr>
+          <p:cNvPr id="36" name="Connector 35"/>
+          <p:cNvCxnSpPr/>
+          <p:nvPr/>
+        </p:nvCxnSpPr>
+        <p:spPr>
+          <a:xfrm>
+            <a:off x="13386816" y="4251960"/>
+            <a:ext cx="649224" cy="585216"/>
+          </a:xfrm>
+          <a:prstGeom prst="line">
+            <a:avLst/>
+          </a:prstGeom>
+          <a:ln w="19050">
+            <a:solidFill>
+              <a:srgbClr val="0766D1"/>
+            </a:solidFill>
+            <a:tailEnd type="triangle" w="med" len="med"/>
+          </a:ln>
+          <a:effectLst/>
+        </p:spPr>
+        <p:style>
+          <a:lnRef idx="2">
+            <a:schemeClr val="accent1"/>
+          </a:lnRef>
+          <a:fillRef idx="0">
+            <a:schemeClr val="accent1"/>
+          </a:fillRef>
+          <a:effectRef idx="1">
+            <a:schemeClr val="accent1"/>
+          </a:effectRef>
+          <a:fontRef idx="minor">
+            <a:schemeClr val="tx1"/>
+          </a:fontRef>
+        </p:style>
+      </p:cxnSp>
+      <p:sp>
+        <p:nvSpPr>
+          <p:cNvPr id="37" name="Rounded Rectangle 36"/>
           <p:cNvSpPr/>
           <p:nvPr/>
         </p:nvSpPr>
         <p:spPr>
           <a:xfrm>
-            <a:off x="6263640" y="7488936"/>
-            <a:ext cx="2011680" cy="384048"/>
+            <a:off x="14081760" y="5367527"/>
+            <a:ext cx="2944368" cy="658368"/>
           </a:xfrm>
           <a:prstGeom prst="roundRect">
             <a:avLst>
-              <a:gd name="adj" fmla="val 50000"/>
+              <a:gd name="adj" fmla="val 13888"/>
             </a:avLst>
           </a:prstGeom>
           <a:solidFill>
             <a:srgbClr val="0766D1"/>
-          </a:solidFill>
-          <a:ln>
-            <a:noFill/>
-          </a:ln>
-          <a:effectLst/>
-        </p:spPr>
-        <p:style>
-          <a:lnRef idx="1">
-            <a:schemeClr val="accent1"/>
-          </a:lnRef>
-          <a:fillRef idx="3">
-            <a:schemeClr val="accent1"/>
-          </a:fillRef>
-          <a:effectRef idx="2">
-            <a:schemeClr val="accent1"/>
-          </a:effectRef>
-          <a:fontRef idx="minor">
-            <a:schemeClr val="lt1"/>
-          </a:fontRef>
-        </p:style>
-        <p:txBody>
-          <a:bodyPr rtlCol="0" anchor="ctr" wrap="square" lIns="73152" tIns="18288" rIns="73152" bIns="18288"/>
-          <a:lstStyle/>
-          <a:p>
-            <a:pPr algn="ctr"/>
-            <a:r>
-              <a:rPr sz="1200">
-                <a:solidFill>
-                  <a:srgbClr val="FFFFFF"/>
-                </a:solidFill>
-                <a:latin typeface="+mj-lt"/>
-              </a:rPr>
-              <a:t>4 · The assistant</a:t>
-            </a:r>
-          </a:p>
-        </p:txBody>
-      </p:sp>
-      <p:sp>
-        <p:nvSpPr>
-          <p:cNvPr id="22" name="TextBox 21"/>
-          <p:cNvSpPr txBox="1"/>
-          <p:nvPr/>
-        </p:nvSpPr>
-        <p:spPr>
-          <a:xfrm>
-            <a:off x="8458200" y="7370063"/>
-            <a:ext cx="3886200" cy="1188720"/>
-          </a:xfrm>
-          <a:prstGeom prst="rect">
-            <a:avLst/>
-          </a:prstGeom>
-          <a:noFill/>
-        </p:spPr>
-        <p:txBody>
-          <a:bodyPr wrap="square" lIns="45720" tIns="27432" rIns="45720" bIns="27432" anchor="ctr">
-            <a:spAutoFit/>
-          </a:bodyPr>
-          <a:lstStyle/>
-          <a:p>
-            <a:pPr algn="l"/>
-            <a:r>
-              <a:rPr sz="1150">
-                <a:solidFill>
-                  <a:srgbClr val="262626"/>
-                </a:solidFill>
-              </a:rPr>
-              <a:t>A language model that reads the free text ("you mentioned blood: tick it, it changes the advice"), answers questions in English or Arabic, and never diagnoses or changes the pathway.</a:t>
-            </a:r>
-          </a:p>
-        </p:txBody>
-      </p:sp>
-      <p:sp>
-        <p:nvSpPr>
-          <p:cNvPr id="23" name="Right Arrow 22"/>
-          <p:cNvSpPr/>
-          <p:nvPr/>
-        </p:nvSpPr>
-        <p:spPr>
-          <a:xfrm>
-            <a:off x="12710160" y="5349240"/>
-            <a:ext cx="640080" cy="411480"/>
-          </a:xfrm>
-          <a:prstGeom prst="rightArrow">
-            <a:avLst/>
-          </a:prstGeom>
-          <a:solidFill>
-            <a:srgbClr val="0766D1"/>
-          </a:solidFill>
-          <a:ln>
-            <a:noFill/>
-          </a:ln>
-          <a:effectLst/>
-        </p:spPr>
-        <p:style>
-          <a:lnRef idx="1">
-            <a:schemeClr val="accent1"/>
-          </a:lnRef>
-          <a:fillRef idx="3">
-            <a:schemeClr val="accent1"/>
-          </a:fillRef>
-          <a:effectRef idx="2">
-            <a:schemeClr val="accent1"/>
-          </a:effectRef>
-          <a:fontRef idx="minor">
-            <a:schemeClr val="lt1"/>
-          </a:fontRef>
-        </p:style>
-        <p:txBody>
-          <a:bodyPr rtlCol="0" anchor="ctr"/>
-          <a:lstStyle/>
-          <a:p>
-            <a:pPr algn="ctr"/>
-          </a:p>
-        </p:txBody>
-      </p:sp>
-      <p:sp>
-        <p:nvSpPr>
-          <p:cNvPr id="24" name="Rounded Rectangle 23"/>
-          <p:cNvSpPr/>
-          <p:nvPr/>
-        </p:nvSpPr>
-        <p:spPr>
-          <a:xfrm>
-            <a:off x="13350240" y="2331720"/>
-            <a:ext cx="3675888" cy="6492240"/>
-          </a:xfrm>
-          <a:prstGeom prst="roundRect">
-            <a:avLst>
-              <a:gd name="adj" fmla="val 6965"/>
-            </a:avLst>
-          </a:prstGeom>
-          <a:solidFill>
-            <a:srgbClr val="FFFFFF"/>
           </a:solidFill>
           <a:ln>
             <a:noFill/>
@@ -15079,61 +15501,74 @@
           </a:fontRef>
         </p:style>
         <p:txBody>
-          <a:bodyPr rtlCol="0" anchor="ctr"/>
+          <a:bodyPr rtlCol="0" anchor="ctr" wrap="square" tIns="27432" bIns="27432"/>
           <a:lstStyle/>
           <a:p>
             <a:pPr algn="ctr"/>
-          </a:p>
-        </p:txBody>
-      </p:sp>
-      <p:sp>
-        <p:nvSpPr>
-          <p:cNvPr id="25" name="TextBox 24"/>
-          <p:cNvSpPr txBox="1"/>
-          <p:nvPr/>
-        </p:nvSpPr>
-        <p:spPr>
-          <a:xfrm>
-            <a:off x="13624560" y="2606040"/>
-            <a:ext cx="3127248" cy="274320"/>
-          </a:xfrm>
-          <a:prstGeom prst="rect">
-            <a:avLst/>
-          </a:prstGeom>
-          <a:noFill/>
-        </p:spPr>
-        <p:txBody>
-          <a:bodyPr wrap="square" lIns="45720" tIns="27432" rIns="45720" bIns="27432" anchor="t">
-            <a:spAutoFit/>
-          </a:bodyPr>
-          <a:lstStyle/>
-          <a:p>
-            <a:pPr algn="l"/>
-            <a:r>
-              <a:rPr sz="1050">
-                <a:solidFill>
-                  <a:srgbClr val="0766D1"/>
+            <a:r>
+              <a:rPr sz="1200">
+                <a:solidFill>
+                  <a:srgbClr val="FFFFFF"/>
                 </a:solidFill>
                 <a:latin typeface="+mj-lt"/>
               </a:rPr>
-              <a:t>WHAT COMES BACK</a:t>
-            </a:r>
-          </a:p>
-        </p:txBody>
-      </p:sp>
-      <p:sp>
-        <p:nvSpPr>
-          <p:cNvPr id="26" name="Oval 25"/>
+              <a:t>Lifestyle levers</a:t>
+            </a:r>
+          </a:p>
+        </p:txBody>
+      </p:sp>
+      <p:cxnSp>
+        <p:nvCxnSpPr>
+          <p:cNvPr id="38" name="Connector 37"/>
+          <p:cNvCxnSpPr/>
+          <p:nvPr/>
+        </p:nvCxnSpPr>
+        <p:spPr>
+          <a:xfrm>
+            <a:off x="13386816" y="4251960"/>
+            <a:ext cx="649224" cy="1444752"/>
+          </a:xfrm>
+          <a:prstGeom prst="line">
+            <a:avLst/>
+          </a:prstGeom>
+          <a:ln w="19050">
+            <a:solidFill>
+              <a:srgbClr val="0766D1"/>
+            </a:solidFill>
+            <a:tailEnd type="triangle" w="med" len="med"/>
+          </a:ln>
+          <a:effectLst/>
+        </p:spPr>
+        <p:style>
+          <a:lnRef idx="2">
+            <a:schemeClr val="accent1"/>
+          </a:lnRef>
+          <a:fillRef idx="0">
+            <a:schemeClr val="accent1"/>
+          </a:fillRef>
+          <a:effectRef idx="1">
+            <a:schemeClr val="accent1"/>
+          </a:effectRef>
+          <a:fontRef idx="minor">
+            <a:schemeClr val="tx1"/>
+          </a:fontRef>
+        </p:style>
+      </p:cxnSp>
+      <p:sp>
+        <p:nvSpPr>
+          <p:cNvPr id="39" name="Rounded Rectangle 38"/>
           <p:cNvSpPr/>
           <p:nvPr/>
         </p:nvSpPr>
         <p:spPr>
           <a:xfrm>
-            <a:off x="13642848" y="3081528"/>
-            <a:ext cx="512064" cy="512064"/>
-          </a:xfrm>
-          <a:prstGeom prst="ellipse">
-            <a:avLst/>
+            <a:off x="14081760" y="6227064"/>
+            <a:ext cx="2944368" cy="658368"/>
+          </a:xfrm>
+          <a:prstGeom prst="roundRect">
+            <a:avLst>
+              <a:gd name="adj" fmla="val 13888"/>
+            </a:avLst>
           </a:prstGeom>
           <a:solidFill>
             <a:srgbClr val="032954"/>
@@ -15141,7 +15576,13 @@
           <a:ln>
             <a:noFill/>
           </a:ln>
-          <a:effectLst/>
+          <a:effectLst>
+            <a:outerShdw blurRad="203200" dist="38100" dir="5400000" algn="ctr" rotWithShape="0">
+              <a:srgbClr val="000000">
+                <a:alpha val="16000"/>
+              </a:srgbClr>
+            </a:outerShdw>
+          </a:effectLst>
         </p:spPr>
         <p:style>
           <a:lnRef idx="1">
@@ -15158,119 +15599,62 @@
           </a:fontRef>
         </p:style>
         <p:txBody>
-          <a:bodyPr rtlCol="0" anchor="ctr"/>
+          <a:bodyPr rtlCol="0" anchor="ctr" wrap="square" tIns="27432" bIns="27432"/>
           <a:lstStyle/>
           <a:p>
             <a:pPr algn="ctr"/>
-          </a:p>
-        </p:txBody>
-      </p:sp>
+            <a:r>
+              <a:rPr sz="1200">
+                <a:solidFill>
+                  <a:srgbClr val="FFFFFF"/>
+                </a:solidFill>
+                <a:latin typeface="+mj-lt"/>
+              </a:rPr>
+              <a:t>Answer questions (LLM)</a:t>
+            </a:r>
+          </a:p>
+        </p:txBody>
+      </p:sp>
+      <p:cxnSp>
+        <p:nvCxnSpPr>
+          <p:cNvPr id="40" name="Connector 39"/>
+          <p:cNvCxnSpPr/>
+          <p:nvPr/>
+        </p:nvCxnSpPr>
+        <p:spPr>
+          <a:xfrm>
+            <a:off x="13386816" y="4251960"/>
+            <a:ext cx="649224" cy="2304288"/>
+          </a:xfrm>
+          <a:prstGeom prst="line">
+            <a:avLst/>
+          </a:prstGeom>
+          <a:ln w="19050">
+            <a:solidFill>
+              <a:srgbClr val="0766D1"/>
+            </a:solidFill>
+            <a:tailEnd type="triangle" w="med" len="med"/>
+          </a:ln>
+          <a:effectLst/>
+        </p:spPr>
+        <p:style>
+          <a:lnRef idx="2">
+            <a:schemeClr val="accent1"/>
+          </a:lnRef>
+          <a:fillRef idx="0">
+            <a:schemeClr val="accent1"/>
+          </a:fillRef>
+          <a:effectRef idx="1">
+            <a:schemeClr val="accent1"/>
+          </a:effectRef>
+          <a:fontRef idx="minor">
+            <a:schemeClr val="tx1"/>
+          </a:fontRef>
+        </p:style>
+      </p:cxnSp>
       <p:pic>
         <p:nvPicPr>
-          <p:cNvPr id="27" name="Picture 26" descr="gauge_w.png"/>
-          <p:cNvPicPr>
-            <a:picLocks noChangeAspect="1"/>
-          </p:cNvPicPr>
-          <p:nvPr/>
-        </p:nvPicPr>
-        <p:blipFill>
-          <a:blip r:embed="rId2"/>
-          <a:stretch>
-            <a:fillRect/>
-          </a:stretch>
-        </p:blipFill>
-        <p:spPr>
-          <a:xfrm>
-            <a:off x="13758062" y="3196742"/>
-            <a:ext cx="281635" cy="281635"/>
-          </a:xfrm>
-          <a:prstGeom prst="rect">
-            <a:avLst/>
-          </a:prstGeom>
-        </p:spPr>
-      </p:pic>
-      <p:sp>
-        <p:nvSpPr>
-          <p:cNvPr id="28" name="TextBox 27"/>
-          <p:cNvSpPr txBox="1"/>
-          <p:nvPr/>
-        </p:nvSpPr>
-        <p:spPr>
-          <a:xfrm>
-            <a:off x="14310360" y="3017520"/>
-            <a:ext cx="2487168" cy="868680"/>
-          </a:xfrm>
-          <a:prstGeom prst="rect">
-            <a:avLst/>
-          </a:prstGeom>
-          <a:noFill/>
-        </p:spPr>
-        <p:txBody>
-          <a:bodyPr wrap="square" lIns="45720" tIns="27432" rIns="45720" bIns="27432" anchor="ctr">
-            <a:spAutoFit/>
-          </a:bodyPr>
-          <a:lstStyle/>
-          <a:p>
-            <a:pPr algn="l"/>
-            <a:r>
-              <a:rPr sz="1200">
-                <a:solidFill>
-                  <a:srgbClr val="262626"/>
-                </a:solidFill>
-                <a:latin typeface="+mj-lt"/>
-              </a:rPr>
-              <a:t>A risk tier, and the chance of finding something</a:t>
-            </a:r>
-          </a:p>
-        </p:txBody>
-      </p:sp>
-      <p:sp>
-        <p:nvSpPr>
-          <p:cNvPr id="29" name="Oval 28"/>
-          <p:cNvSpPr/>
-          <p:nvPr/>
-        </p:nvSpPr>
-        <p:spPr>
-          <a:xfrm>
-            <a:off x="13642848" y="4197096"/>
-            <a:ext cx="512064" cy="512064"/>
-          </a:xfrm>
-          <a:prstGeom prst="ellipse">
-            <a:avLst/>
-          </a:prstGeom>
-          <a:solidFill>
-            <a:srgbClr val="0766D1"/>
-          </a:solidFill>
-          <a:ln>
-            <a:noFill/>
-          </a:ln>
-          <a:effectLst/>
-        </p:spPr>
-        <p:style>
-          <a:lnRef idx="1">
-            <a:schemeClr val="accent1"/>
-          </a:lnRef>
-          <a:fillRef idx="3">
-            <a:schemeClr val="accent1"/>
-          </a:fillRef>
-          <a:effectRef idx="2">
-            <a:schemeClr val="accent1"/>
-          </a:effectRef>
-          <a:fontRef idx="minor">
-            <a:schemeClr val="lt1"/>
-          </a:fontRef>
-        </p:style>
-        <p:txBody>
-          <a:bodyPr rtlCol="0" anchor="ctr"/>
-          <a:lstStyle/>
-          <a:p>
-            <a:pPr algn="ctr"/>
-          </a:p>
-        </p:txBody>
-      </p:sp>
-      <p:pic>
-        <p:nvPicPr>
-          <p:cNvPr id="30" name="Picture 29" descr="workflow_w.png"/>
+          <p:cNvPr id="41" name="Picture 40" descr="map_b.png"/>
           <p:cNvPicPr>
             <a:picLocks noChangeAspect="1"/>
           </p:cNvPicPr>
@@ -15284,8 +15668,8 @@
         </p:blipFill>
         <p:spPr>
           <a:xfrm>
-            <a:off x="13758062" y="4312310"/>
-            <a:ext cx="281635" cy="281635"/>
+            <a:off x="6720840" y="7470648"/>
+            <a:ext cx="457200" cy="457200"/>
           </a:xfrm>
           <a:prstGeom prst="rect">
             <a:avLst/>
@@ -15294,14 +15678,14 @@
       </p:pic>
       <p:sp>
         <p:nvSpPr>
-          <p:cNvPr id="31" name="TextBox 30"/>
+          <p:cNvPr id="42" name="TextBox 41"/>
           <p:cNvSpPr txBox="1"/>
           <p:nvPr/>
         </p:nvSpPr>
         <p:spPr>
           <a:xfrm>
-            <a:off x="14310360" y="4133088"/>
-            <a:ext cx="2487168" cy="868680"/>
+            <a:off x="7269480" y="7452360"/>
+            <a:ext cx="3291840" cy="457200"/>
           </a:xfrm>
           <a:prstGeom prst="rect">
             <a:avLst/>
@@ -15316,64 +15700,96 @@
           <a:p>
             <a:pPr algn="l"/>
             <a:r>
-              <a:rPr sz="1200">
-                <a:solidFill>
-                  <a:srgbClr val="262626"/>
+              <a:rPr sz="1600">
+                <a:solidFill>
+                  <a:srgbClr val="0766D1"/>
                 </a:solidFill>
                 <a:latin typeface="+mj-lt"/>
               </a:rPr>
-              <a:t>The pathway: which test, when, and why</a:t>
-            </a:r>
-          </a:p>
-        </p:txBody>
-      </p:sp>
-      <p:sp>
-        <p:nvSpPr>
-          <p:cNvPr id="32" name="Oval 31"/>
-          <p:cNvSpPr/>
-          <p:nvPr/>
-        </p:nvSpPr>
-        <p:spPr>
-          <a:xfrm>
-            <a:off x="13642848" y="5312664"/>
-            <a:ext cx="512064" cy="512064"/>
-          </a:xfrm>
-          <a:prstGeom prst="ellipse">
-            <a:avLst/>
-          </a:prstGeom>
-          <a:solidFill>
-            <a:srgbClr val="032954"/>
-          </a:solidFill>
-          <a:ln>
-            <a:noFill/>
+              <a:t>Facilities &amp; services table</a:t>
+            </a:r>
+          </a:p>
+        </p:txBody>
+      </p:sp>
+      <p:cxnSp>
+        <p:nvCxnSpPr>
+          <p:cNvPr id="43" name="Connector 42"/>
+          <p:cNvCxnSpPr/>
+          <p:nvPr/>
+        </p:nvCxnSpPr>
+        <p:spPr>
+          <a:xfrm>
+            <a:off x="5184648" y="6995160"/>
+            <a:ext cx="1490472" cy="685800"/>
+          </a:xfrm>
+          <a:prstGeom prst="line">
+            <a:avLst/>
+          </a:prstGeom>
+          <a:ln w="19050">
+            <a:solidFill>
+              <a:srgbClr val="0766D1"/>
+            </a:solidFill>
+            <a:prstDash val="sysDot"/>
+            <a:tailEnd type="triangle" w="med" len="med"/>
           </a:ln>
           <a:effectLst/>
         </p:spPr>
         <p:style>
-          <a:lnRef idx="1">
+          <a:lnRef idx="2">
             <a:schemeClr val="accent1"/>
           </a:lnRef>
-          <a:fillRef idx="3">
+          <a:fillRef idx="0">
             <a:schemeClr val="accent1"/>
           </a:fillRef>
-          <a:effectRef idx="2">
+          <a:effectRef idx="1">
             <a:schemeClr val="accent1"/>
           </a:effectRef>
           <a:fontRef idx="minor">
-            <a:schemeClr val="lt1"/>
+            <a:schemeClr val="tx1"/>
           </a:fontRef>
         </p:style>
-        <p:txBody>
-          <a:bodyPr rtlCol="0" anchor="ctr"/>
-          <a:lstStyle/>
-          <a:p>
-            <a:pPr algn="ctr"/>
-          </a:p>
-        </p:txBody>
-      </p:sp>
+      </p:cxnSp>
+      <p:cxnSp>
+        <p:nvCxnSpPr>
+          <p:cNvPr id="44" name="Connector 43"/>
+          <p:cNvCxnSpPr/>
+          <p:nvPr/>
+        </p:nvCxnSpPr>
+        <p:spPr>
+          <a:xfrm flipV="1">
+            <a:off x="9966960" y="5184647"/>
+            <a:ext cx="5586984" cy="2496313"/>
+          </a:xfrm>
+          <a:prstGeom prst="line">
+            <a:avLst/>
+          </a:prstGeom>
+          <a:ln w="19050">
+            <a:solidFill>
+              <a:srgbClr val="0766D1"/>
+            </a:solidFill>
+            <a:prstDash val="sysDot"/>
+            <a:tailEnd type="triangle" w="med" len="med"/>
+          </a:ln>
+          <a:effectLst/>
+        </p:spPr>
+        <p:style>
+          <a:lnRef idx="2">
+            <a:schemeClr val="accent1"/>
+          </a:lnRef>
+          <a:fillRef idx="0">
+            <a:schemeClr val="accent1"/>
+          </a:fillRef>
+          <a:effectRef idx="1">
+            <a:schemeClr val="accent1"/>
+          </a:effectRef>
+          <a:fontRef idx="minor">
+            <a:schemeClr val="tx1"/>
+          </a:fontRef>
+        </p:style>
+      </p:cxnSp>
       <p:pic>
         <p:nvPicPr>
-          <p:cNvPr id="33" name="Picture 32" descr="map_w.png"/>
+          <p:cNvPr id="45" name="Picture 44" descr="check_b.png"/>
           <p:cNvPicPr>
             <a:picLocks noChangeAspect="1"/>
           </p:cNvPicPr>
@@ -15387,8 +15803,8 @@
         </p:blipFill>
         <p:spPr>
           <a:xfrm>
-            <a:off x="13758062" y="5427878"/>
-            <a:ext cx="281635" cy="281635"/>
+            <a:off x="1252728" y="8385048"/>
+            <a:ext cx="365760" cy="365760"/>
           </a:xfrm>
           <a:prstGeom prst="rect">
             <a:avLst/>
@@ -15397,14 +15813,14 @@
       </p:pic>
       <p:sp>
         <p:nvSpPr>
-          <p:cNvPr id="34" name="TextBox 33"/>
+          <p:cNvPr id="46" name="TextBox 45"/>
           <p:cNvSpPr txBox="1"/>
           <p:nvPr/>
         </p:nvSpPr>
         <p:spPr>
           <a:xfrm>
-            <a:off x="14310360" y="5248656"/>
-            <a:ext cx="2487168" cy="868680"/>
+            <a:off x="1755648" y="8275320"/>
+            <a:ext cx="4511040" cy="685800"/>
           </a:xfrm>
           <a:prstGeom prst="rect">
             <a:avLst/>
@@ -15419,79 +15835,34 @@
           <a:p>
             <a:pPr algn="l"/>
             <a:r>
-              <a:rPr sz="1200">
+              <a:rPr sz="1300">
                 <a:solidFill>
                   <a:srgbClr val="262626"/>
                 </a:solidFill>
-                <a:latin typeface="+mj-lt"/>
-              </a:rPr>
-              <a:t>Where to go, with distance and minutes</a:t>
-            </a:r>
-          </a:p>
-        </p:txBody>
-      </p:sp>
-      <p:sp>
-        <p:nvSpPr>
-          <p:cNvPr id="35" name="Oval 34"/>
-          <p:cNvSpPr/>
-          <p:nvPr/>
-        </p:nvSpPr>
-        <p:spPr>
-          <a:xfrm>
-            <a:off x="13642848" y="6428231"/>
-            <a:ext cx="512064" cy="512064"/>
-          </a:xfrm>
-          <a:prstGeom prst="ellipse">
-            <a:avLst/>
-          </a:prstGeom>
-          <a:solidFill>
-            <a:srgbClr val="0766D1"/>
-          </a:solidFill>
-          <a:ln>
-            <a:noFill/>
-          </a:ln>
-          <a:effectLst/>
-        </p:spPr>
-        <p:style>
-          <a:lnRef idx="1">
-            <a:schemeClr val="accent1"/>
-          </a:lnRef>
-          <a:fillRef idx="3">
-            <a:schemeClr val="accent1"/>
-          </a:fillRef>
-          <a:effectRef idx="2">
-            <a:schemeClr val="accent1"/>
-          </a:effectRef>
-          <a:fontRef idx="minor">
-            <a:schemeClr val="lt1"/>
-          </a:fontRef>
-        </p:style>
-        <p:txBody>
-          <a:bodyPr rtlCol="0" anchor="ctr"/>
-          <a:lstStyle/>
-          <a:p>
-            <a:pPr algn="ctr"/>
+              </a:rPr>
+              <a:t>A risk tier with the measured chance of a finding at colonoscopy</a:t>
+            </a:r>
           </a:p>
         </p:txBody>
       </p:sp>
       <p:pic>
         <p:nvPicPr>
-          <p:cNvPr id="36" name="Picture 35" descr="trend_w.png"/>
+          <p:cNvPr id="47" name="Picture 46" descr="check_b.png"/>
           <p:cNvPicPr>
             <a:picLocks noChangeAspect="1"/>
           </p:cNvPicPr>
           <p:nvPr/>
         </p:nvPicPr>
         <p:blipFill>
-          <a:blip r:embed="rId5"/>
+          <a:blip r:embed="rId4"/>
           <a:stretch>
             <a:fillRect/>
           </a:stretch>
         </p:blipFill>
         <p:spPr>
           <a:xfrm>
-            <a:off x="13758062" y="6543446"/>
-            <a:ext cx="281635" cy="281635"/>
+            <a:off x="6632448" y="8385048"/>
+            <a:ext cx="365760" cy="365760"/>
           </a:xfrm>
           <a:prstGeom prst="rect">
             <a:avLst/>
@@ -15500,14 +15871,14 @@
       </p:pic>
       <p:sp>
         <p:nvSpPr>
-          <p:cNvPr id="37" name="TextBox 36"/>
+          <p:cNvPr id="48" name="TextBox 47"/>
           <p:cNvSpPr txBox="1"/>
           <p:nvPr/>
         </p:nvSpPr>
         <p:spPr>
           <a:xfrm>
-            <a:off x="14310360" y="6364224"/>
-            <a:ext cx="2487168" cy="868680"/>
+            <a:off x="7135368" y="8275320"/>
+            <a:ext cx="4511040" cy="685800"/>
           </a:xfrm>
           <a:prstGeom prst="rect">
             <a:avLst/>
@@ -15522,79 +15893,34 @@
           <a:p>
             <a:pPr algn="l"/>
             <a:r>
-              <a:rPr sz="1200">
+              <a:rPr sz="1300">
                 <a:solidFill>
                   <a:srgbClr val="262626"/>
                 </a:solidFill>
-                <a:latin typeface="+mj-lt"/>
-              </a:rPr>
-              <a:t>What they can change: smoking, weight, activity, diet</a:t>
-            </a:r>
-          </a:p>
-        </p:txBody>
-      </p:sp>
-      <p:sp>
-        <p:nvSpPr>
-          <p:cNvPr id="38" name="Oval 37"/>
-          <p:cNvSpPr/>
-          <p:nvPr/>
-        </p:nvSpPr>
-        <p:spPr>
-          <a:xfrm>
-            <a:off x="13642848" y="7543800"/>
-            <a:ext cx="512064" cy="512064"/>
-          </a:xfrm>
-          <a:prstGeom prst="ellipse">
-            <a:avLst/>
-          </a:prstGeom>
-          <a:solidFill>
-            <a:srgbClr val="C00000"/>
-          </a:solidFill>
-          <a:ln>
-            <a:noFill/>
-          </a:ln>
-          <a:effectLst/>
-        </p:spPr>
-        <p:style>
-          <a:lnRef idx="1">
-            <a:schemeClr val="accent1"/>
-          </a:lnRef>
-          <a:fillRef idx="3">
-            <a:schemeClr val="accent1"/>
-          </a:fillRef>
-          <a:effectRef idx="2">
-            <a:schemeClr val="accent1"/>
-          </a:effectRef>
-          <a:fontRef idx="minor">
-            <a:schemeClr val="lt1"/>
-          </a:fontRef>
-        </p:style>
-        <p:txBody>
-          <a:bodyPr rtlCol="0" anchor="ctr"/>
-          <a:lstStyle/>
-          <a:p>
-            <a:pPr algn="ctr"/>
+              </a:rPr>
+              <a:t>The right test, when it is due, and where to go, on a map</a:t>
+            </a:r>
           </a:p>
         </p:txBody>
       </p:sp>
       <p:pic>
         <p:nvPicPr>
-          <p:cNvPr id="39" name="Picture 38" descr="alarm_w.png"/>
+          <p:cNvPr id="49" name="Picture 48" descr="check_b.png"/>
           <p:cNvPicPr>
             <a:picLocks noChangeAspect="1"/>
           </p:cNvPicPr>
           <p:nvPr/>
         </p:nvPicPr>
         <p:blipFill>
-          <a:blip r:embed="rId6"/>
+          <a:blip r:embed="rId4"/>
           <a:stretch>
             <a:fillRect/>
           </a:stretch>
         </p:blipFill>
         <p:spPr>
           <a:xfrm>
-            <a:off x="13758062" y="7659014"/>
-            <a:ext cx="281635" cy="281635"/>
+            <a:off x="12012168" y="8385048"/>
+            <a:ext cx="365760" cy="365760"/>
           </a:xfrm>
           <a:prstGeom prst="rect">
             <a:avLst/>
@@ -15603,14 +15929,14 @@
       </p:pic>
       <p:sp>
         <p:nvSpPr>
-          <p:cNvPr id="40" name="TextBox 39"/>
+          <p:cNvPr id="50" name="TextBox 49"/>
           <p:cNvSpPr txBox="1"/>
           <p:nvPr/>
         </p:nvSpPr>
         <p:spPr>
           <a:xfrm>
-            <a:off x="14310360" y="7479792"/>
-            <a:ext cx="2487168" cy="868680"/>
+            <a:off x="12515088" y="8275320"/>
+            <a:ext cx="4511040" cy="685800"/>
           </a:xfrm>
           <a:prstGeom prst="rect">
             <a:avLst/>
@@ -15625,26 +15951,25 @@
           <a:p>
             <a:pPr algn="l"/>
             <a:r>
-              <a:rPr sz="1200">
+              <a:rPr sz="1300">
                 <a:solidFill>
                   <a:srgbClr val="262626"/>
                 </a:solidFill>
-                <a:latin typeface="+mj-lt"/>
-              </a:rPr>
-              <a:t>Red flags override everything: the urgent route, not screening</a:t>
-            </a:r>
-          </a:p>
-        </p:txBody>
-      </p:sp>
-      <p:sp>
-        <p:nvSpPr>
-          <p:cNvPr id="41" name="TextBox 40"/>
+              </a:rPr>
+              <a:t>Red flags routed to a doctor within two weeks, not into the screening queue</a:t>
+            </a:r>
+          </a:p>
+        </p:txBody>
+      </p:sp>
+      <p:sp>
+        <p:nvSpPr>
+          <p:cNvPr id="51" name="TextBox 50"/>
           <p:cNvSpPr txBox="1"/>
           <p:nvPr/>
         </p:nvSpPr>
         <p:spPr>
           <a:xfrm>
-            <a:off x="1252728" y="8942832"/>
+            <a:off x="1252728" y="9006840"/>
             <a:ext cx="15773400" cy="365760"/>
           </a:xfrm>
           <a:prstGeom prst="rect">
@@ -15660,7 +15985,7 @@
           <a:p>
             <a:pPr algn="l"/>
             <a:r>
-              <a:rPr sz="1200">
+              <a:rPr sz="1100">
                 <a:solidFill>
                   <a:srgbClr val="7E889A"/>
                 </a:solidFill>
